--- a/lectures/09-CountData.pptx
+++ b/lectures/09-CountData.pptx
@@ -1,5 +1,341 @@
 
-<file path=ppt/presentation.xml><?xml version="1.0" encoding="utf-8"?>
+<file path=docProps\app.xml><?xml version="1.0" encoding="utf-8"?>
+<Properties xmlns="http://schemas.openxmlformats.org/officeDocument/2006/extended-properties" xmlns:vt="http://schemas.openxmlformats.org/officeDocument/2006/docPropsVTypes">
+  <Template/>
+  <TotalTime>4816</TotalTime>
+  <Words>6153</Words>
+  <Application>Microsoft Office PowerPoint</Application>
+  <PresentationFormat>On-screen Show (4:3)</PresentationFormat>
+  <Paragraphs>787</Paragraphs>
+  <Slides>88</Slides>
+  <Notes>0</Notes>
+  <HiddenSlides>1</HiddenSlides>
+  <MMClips>0</MMClips>
+  <ScaleCrop>false</ScaleCrop>
+  <HeadingPairs>
+    <vt:vector size="6" baseType="variant">
+      <vt:variant>
+        <vt:lpstr>Fonts Used</vt:lpstr>
+      </vt:variant>
+      <vt:variant>
+        <vt:i4>8</vt:i4>
+      </vt:variant>
+      <vt:variant>
+        <vt:lpstr>Theme</vt:lpstr>
+      </vt:variant>
+      <vt:variant>
+        <vt:i4>1</vt:i4>
+      </vt:variant>
+      <vt:variant>
+        <vt:lpstr>Slide Titles</vt:lpstr>
+      </vt:variant>
+      <vt:variant>
+        <vt:i4>88</vt:i4>
+      </vt:variant>
+    </vt:vector>
+  </HeadingPairs>
+  <TitlesOfParts>
+    <vt:vector size="97" baseType="lpstr">
+      <vt:lpstr>Arial</vt:lpstr>
+      <vt:lpstr>Calibri</vt:lpstr>
+      <vt:lpstr>Cambria Math</vt:lpstr>
+      <vt:lpstr>Courier New</vt:lpstr>
+      <vt:lpstr>Euclid Math One</vt:lpstr>
+      <vt:lpstr>Script MT Bold</vt:lpstr>
+      <vt:lpstr>Symbol</vt:lpstr>
+      <vt:lpstr>Wingdings</vt:lpstr>
+      <vt:lpstr>1_Office Theme</vt:lpstr>
+      <vt:lpstr>GLMs for Count Data</vt:lpstr>
+      <vt:lpstr>Topics</vt:lpstr>
+      <vt:lpstr>Count data models: Overview</vt:lpstr>
+      <vt:lpstr>Generalized linear models</vt:lpstr>
+      <vt:lpstr>Generalized linear models</vt:lpstr>
+      <vt:lpstr>Generalized linear models</vt:lpstr>
+      <vt:lpstr>GLMs: The light</vt:lpstr>
+      <vt:lpstr>GLMs: Families</vt:lpstr>
+      <vt:lpstr>Link functions for the mean</vt:lpstr>
+      <vt:lpstr>Link functions for binomial data</vt:lpstr>
+      <vt:lpstr>Example: BeetleMortality</vt:lpstr>
+      <vt:lpstr>PowerPoint Presentation</vt:lpstr>
+      <vt:lpstr>Canonical links and variance functions</vt:lpstr>
+      <vt:lpstr>Variance functions &amp; overdispersion</vt:lpstr>
+      <vt:lpstr>What is overdispersion?</vt:lpstr>
+      <vt:lpstr>Maximum likelihood estimation</vt:lpstr>
+      <vt:lpstr>Maximum likelihood estimation</vt:lpstr>
+      <vt:lpstr>Iteratively reweighted least squares</vt:lpstr>
+      <vt:lpstr>Maximum likelihood estimation</vt:lpstr>
+      <vt:lpstr>Goodness of fit</vt:lpstr>
+      <vt:lpstr>GLMs for count data</vt:lpstr>
+      <vt:lpstr>Example: Publications of PhD candiates</vt:lpstr>
+      <vt:lpstr>Example: Publications of PhD candidates</vt:lpstr>
+      <vt:lpstr>PowerPoint Presentation</vt:lpstr>
+      <vt:lpstr>Fitting the Poisson model</vt:lpstr>
+      <vt:lpstr>Interpreting coefficients</vt:lpstr>
+      <vt:lpstr>Effect plots</vt:lpstr>
+      <vt:lpstr>PowerPoint Presentation</vt:lpstr>
+      <vt:lpstr>Model diagnostics</vt:lpstr>
+      <vt:lpstr>Checking for interactions</vt:lpstr>
+      <vt:lpstr>Compare models</vt:lpstr>
+      <vt:lpstr>Compare models</vt:lpstr>
+      <vt:lpstr>Basic model plots</vt:lpstr>
+      <vt:lpstr>Nonlinearity diagnostics</vt:lpstr>
+      <vt:lpstr>Nonlinearity diagnostics: crPlot()</vt:lpstr>
+      <vt:lpstr>Residuals</vt:lpstr>
+      <vt:lpstr>Residuals</vt:lpstr>
+      <vt:lpstr>Outliers, leverage &amp; influence</vt:lpstr>
+      <vt:lpstr>Who is influential &amp; why?</vt:lpstr>
+      <vt:lpstr>Outlier test</vt:lpstr>
+      <vt:lpstr>PowerPoint Presentation</vt:lpstr>
+      <vt:lpstr>Overdispersion</vt:lpstr>
+      <vt:lpstr>Testing overdispersion</vt:lpstr>
+      <vt:lpstr>Quasi-poisson models</vt:lpstr>
+      <vt:lpstr>Quasi-poisson models</vt:lpstr>
+      <vt:lpstr>Fitting the quasi-poisson model</vt:lpstr>
+      <vt:lpstr>PowerPoint Presentation</vt:lpstr>
+      <vt:lpstr>The negative-binomial model</vt:lpstr>
+      <vt:lpstr>The negative-binomial model</vt:lpstr>
+      <vt:lpstr>Fitting the negative-binomial</vt:lpstr>
+      <vt:lpstr>Visualizing goodness-of-fit</vt:lpstr>
+      <vt:lpstr>Comparing models: What difference does it make?</vt:lpstr>
+      <vt:lpstr>Visualizing the mean-variance relation</vt:lpstr>
+      <vt:lpstr>What have we learned?</vt:lpstr>
+      <vt:lpstr>What have we learned?</vt:lpstr>
+      <vt:lpstr>Excess zeros</vt:lpstr>
+      <vt:lpstr>Excess zero counts</vt:lpstr>
+      <vt:lpstr>Models for excess zeros</vt:lpstr>
+      <vt:lpstr>Zero-inflated models</vt:lpstr>
+      <vt:lpstr>Zero-inflated models: ZIP &amp; ZINB</vt:lpstr>
+      <vt:lpstr>Exploring zero-inflated data</vt:lpstr>
+      <vt:lpstr>Exploring zero-inflated data</vt:lpstr>
+      <vt:lpstr>Hurdle models</vt:lpstr>
+      <vt:lpstr>Fitting ZIP &amp; Hurdle models</vt:lpstr>
+      <vt:lpstr>Visualizing zero counts</vt:lpstr>
+      <vt:lpstr>Fitting models</vt:lpstr>
+      <vt:lpstr>Comparing models</vt:lpstr>
+      <vt:lpstr>PowerPoint Presentation</vt:lpstr>
+      <vt:lpstr>PowerPoint Presentation</vt:lpstr>
+      <vt:lpstr>Model interpretation: Coefficients</vt:lpstr>
+      <vt:lpstr>Model interpretation: Coefficients</vt:lpstr>
+      <vt:lpstr>Model interpretation: Effect plots</vt:lpstr>
+      <vt:lpstr>PowerPoint Presentation</vt:lpstr>
+      <vt:lpstr>What have we learned?</vt:lpstr>
+      <vt:lpstr>What have we learned?</vt:lpstr>
+      <vt:lpstr>What have we forgotten?</vt:lpstr>
+      <vt:lpstr>What have we forgotten?</vt:lpstr>
+      <vt:lpstr>What I missed</vt:lpstr>
+      <vt:lpstr>Back to square TWO</vt:lpstr>
+      <vt:lpstr>Visualize the interaction</vt:lpstr>
+      <vt:lpstr>Visualize the interaction– The other way</vt:lpstr>
+      <vt:lpstr>Back to square ONE</vt:lpstr>
+      <vt:lpstr>Compare distributions</vt:lpstr>
+      <vt:lpstr>What to do?</vt:lpstr>
+      <vt:lpstr>What else is there?</vt:lpstr>
+      <vt:lpstr>Other methods: Recursive partitioning</vt:lpstr>
+      <vt:lpstr>Other methods: Recursive partitioning</vt:lpstr>
+      <vt:lpstr>Summary</vt:lpstr>
+    </vt:vector>
+  </TitlesOfParts>
+  <Company>YORK UNIVERSITY</Company>
+  <LinksUpToDate>false</LinksUpToDate>
+  <SharedDoc>false</SharedDoc>
+  <HyperlinksChanged>false</HyperlinksChanged>
+  <AppVersion>16.0000</AppVersion>
+</Properties>
+</file>
+
+<file path=docProps\core.xml><?xml version="1.0" encoding="utf-8"?>
+<cp:coreProperties xmlns:cp="http://schemas.openxmlformats.org/package/2006/metadata/core-properties" xmlns:dc="http://purl.org/dc/elements/1.1/" xmlns:dcterms="http://purl.org/dc/terms/" xmlns:dcmitype="http://purl.org/dc/dcmitype/" xmlns:xsi="http://www.w3.org/2001/XMLSchema-instance">
+  <dc:title>09-CountData</dc:title>
+  <dc:creator>Michael Friendly</dc:creator>
+  <cp:lastModifiedBy>Michael L Friendly</cp:lastModifiedBy>
+  <cp:revision>121</cp:revision>
+  <dcterms:created xsi:type="dcterms:W3CDTF">2017-10-14T20:35:56Z</dcterms:created>
+  <dcterms:modified xsi:type="dcterms:W3CDTF">2023-03-28T18:18:26Z</dcterms:modified>
+</cp:coreProperties>
+</file>
+
+<file path=ppt\handoutMasters\handoutMaster1.xml><?xml version="1.0" encoding="utf-8"?>
+<p:handoutMaster xmlns:a="http://schemas.openxmlformats.org/drawingml/2006/main" xmlns:r="http://schemas.openxmlformats.org/officeDocument/2006/relationships" xmlns:p="http://schemas.openxmlformats.org/presentationml/2006/main">
+  <p:cSld>
+    <p:bg>
+      <p:bgRef idx="1001">
+        <a:schemeClr val="bg1"/>
+      </p:bgRef>
+    </p:bg>
+    <p:spTree>
+      <p:nvGrpSpPr>
+        <p:cNvPr id="1" name=""/>
+        <p:cNvGrpSpPr/>
+        <p:nvPr/>
+      </p:nvGrpSpPr>
+      <p:grpSpPr>
+        <a:xfrm>
+          <a:off x="0" y="0"/>
+          <a:ext cx="0" cy="0"/>
+          <a:chOff x="0" y="0"/>
+          <a:chExt cx="0" cy="0"/>
+        </a:xfrm>
+      </p:grpSpPr>
+      <p:sp>
+        <p:nvSpPr>
+          <p:cNvPr id="2" name="Header Placeholder 1"/>
+          <p:cNvSpPr>
+            <a:spLocks noGrp="1"/>
+          </p:cNvSpPr>
+          <p:nvPr>
+            <p:ph type="hdr" sz="quarter"/>
+          </p:nvPr>
+        </p:nvSpPr>
+        <p:spPr>
+          <a:xfrm>
+            <a:off x="0" y="0"/>
+            <a:ext cx="2971800" cy="457200"/>
+          </a:xfrm>
+          <a:prstGeom prst="rect">
+            <a:avLst/>
+          </a:prstGeom>
+        </p:spPr>
+        <p:txBody>
+          <a:bodyPr vert="horz" lIns="91440" tIns="45720" rIns="91440" bIns="45720" rtlCol="0"/>
+          <a:lstStyle>
+            <a:lvl1pPr algn="l">
+              <a:defRPr sz="1200"/>
+            </a:lvl1pPr>
+          </a:lstStyle>
+          <a:p>
+            <a:endParaRPr lang="en-US"/>
+          </a:p>
+        </p:txBody>
+      </p:sp>
+      <p:sp>
+        <p:nvSpPr>
+          <p:cNvPr id="3" name="Date Placeholder 2"/>
+          <p:cNvSpPr>
+            <a:spLocks noGrp="1"/>
+          </p:cNvSpPr>
+          <p:nvPr>
+            <p:ph type="dt" sz="quarter" idx="1"/>
+          </p:nvPr>
+        </p:nvSpPr>
+        <p:spPr>
+          <a:xfrm>
+            <a:off x="3884613" y="0"/>
+            <a:ext cx="2971800" cy="457200"/>
+          </a:xfrm>
+          <a:prstGeom prst="rect">
+            <a:avLst/>
+          </a:prstGeom>
+        </p:spPr>
+        <p:txBody>
+          <a:bodyPr vert="horz" lIns="91440" tIns="45720" rIns="91440" bIns="45720" rtlCol="0"/>
+          <a:lstStyle>
+            <a:lvl1pPr algn="r">
+              <a:defRPr sz="1200"/>
+            </a:lvl1pPr>
+          </a:lstStyle>
+          <a:p>
+            <a:fld id="{08BD4FA9-F3CE-45B3-A980-C331C6F1EF65}" type="datetimeFigureOut">
+              <a:rPr lang="en-US" smtClean="0"/>
+              <a:t>3/28/2023</a:t>
+            </a:fld>
+            <a:endParaRPr lang="en-US"/>
+          </a:p>
+        </p:txBody>
+      </p:sp>
+      <p:sp>
+        <p:nvSpPr>
+          <p:cNvPr id="4" name="Footer Placeholder 3"/>
+          <p:cNvSpPr>
+            <a:spLocks noGrp="1"/>
+          </p:cNvSpPr>
+          <p:nvPr>
+            <p:ph type="ftr" sz="quarter" idx="2"/>
+          </p:nvPr>
+        </p:nvSpPr>
+        <p:spPr>
+          <a:xfrm>
+            <a:off x="0" y="8685213"/>
+            <a:ext cx="2971800" cy="457200"/>
+          </a:xfrm>
+          <a:prstGeom prst="rect">
+            <a:avLst/>
+          </a:prstGeom>
+        </p:spPr>
+        <p:txBody>
+          <a:bodyPr vert="horz" lIns="91440" tIns="45720" rIns="91440" bIns="45720" rtlCol="0" anchor="b"/>
+          <a:lstStyle>
+            <a:lvl1pPr algn="l">
+              <a:defRPr sz="1200"/>
+            </a:lvl1pPr>
+          </a:lstStyle>
+          <a:p>
+            <a:endParaRPr lang="en-US"/>
+          </a:p>
+        </p:txBody>
+      </p:sp>
+      <p:sp>
+        <p:nvSpPr>
+          <p:cNvPr id="5" name="Slide Number Placeholder 4"/>
+          <p:cNvSpPr>
+            <a:spLocks noGrp="1"/>
+          </p:cNvSpPr>
+          <p:nvPr>
+            <p:ph type="sldNum" sz="quarter" idx="3"/>
+          </p:nvPr>
+        </p:nvSpPr>
+        <p:spPr>
+          <a:xfrm>
+            <a:off x="3884613" y="8685213"/>
+            <a:ext cx="2971800" cy="457200"/>
+          </a:xfrm>
+          <a:prstGeom prst="rect">
+            <a:avLst/>
+          </a:prstGeom>
+        </p:spPr>
+        <p:txBody>
+          <a:bodyPr vert="horz" lIns="91440" tIns="45720" rIns="91440" bIns="45720" rtlCol="0" anchor="b"/>
+          <a:lstStyle>
+            <a:lvl1pPr algn="r">
+              <a:defRPr sz="1200"/>
+            </a:lvl1pPr>
+          </a:lstStyle>
+          <a:p>
+            <a:fld id="{C7CD5E95-8CAD-4274-BFFA-CD87442DEA8C}" type="slidenum">
+              <a:rPr lang="en-US" smtClean="0"/>
+              <a:t>‹#›</a:t>
+            </a:fld>
+            <a:endParaRPr lang="en-US"/>
+          </a:p>
+        </p:txBody>
+      </p:sp>
+    </p:spTree>
+    <p:extLst>
+      <p:ext uri="{BB962C8B-B14F-4D97-AF65-F5344CB8AC3E}">
+        <p14:creationId xmlns:p14="http://schemas.microsoft.com/office/powerpoint/2010/main" val="1310769078"/>
+      </p:ext>
+    </p:extLst>
+  </p:cSld>
+  <p:clrMap bg1="lt1" tx1="dk1" bg2="lt2" tx2="dk2" accent1="accent1" accent2="accent2" accent3="accent3" accent4="accent4" accent5="accent5" accent6="accent6" hlink="hlink" folHlink="folHlink"/>
+</p:handoutMaster>
+</file>
+
+<file path=ppt\presProps.xml><?xml version="1.0" encoding="utf-8"?>
+<p:presentationPr xmlns:a="http://schemas.openxmlformats.org/drawingml/2006/main" xmlns:r="http://schemas.openxmlformats.org/officeDocument/2006/relationships" xmlns:p="http://schemas.openxmlformats.org/presentationml/2006/main">
+  <p:extLst>
+    <p:ext uri="{E76CE94A-603C-4142-B9EB-6D1370010A27}">
+      <p14:discardImageEditData xmlns:p14="http://schemas.microsoft.com/office/powerpoint/2010/main" val="0"/>
+    </p:ext>
+    <p:ext uri="{D31A062A-798A-4329-ABDD-BBA856620510}">
+      <p14:defaultImageDpi xmlns:p14="http://schemas.microsoft.com/office/powerpoint/2010/main" val="220"/>
+    </p:ext>
+    <p:ext uri="{FD5EFAAD-0ECE-453E-9831-46B23BE46B34}">
+      <p15:chartTrackingRefBased xmlns:p15="http://schemas.microsoft.com/office/powerpoint/2012/main" val="0"/>
+    </p:ext>
+  </p:extLst>
+</p:presentationPr>
+</file>
+
+<file path=ppt\presentation.xml><?xml version="1.0" encoding="utf-8"?>
 <p:presentation xmlns:a="http://schemas.openxmlformats.org/drawingml/2006/main" xmlns:r="http://schemas.openxmlformats.org/officeDocument/2006/relationships" xmlns:p="http://schemas.openxmlformats.org/presentationml/2006/main" saveSubsetFonts="1">
   <p:sldMasterIdLst>
     <p:sldMasterId id="2147483660" r:id="rId1"/>
@@ -347,172 +683,7 @@
 </p:presentation>
 </file>
 
-<file path=ppt/handoutMasters/handoutMaster1.xml><?xml version="1.0" encoding="utf-8"?>
-<p:handoutMaster xmlns:a="http://schemas.openxmlformats.org/drawingml/2006/main" xmlns:r="http://schemas.openxmlformats.org/officeDocument/2006/relationships" xmlns:p="http://schemas.openxmlformats.org/presentationml/2006/main">
-  <p:cSld>
-    <p:bg>
-      <p:bgRef idx="1001">
-        <a:schemeClr val="bg1"/>
-      </p:bgRef>
-    </p:bg>
-    <p:spTree>
-      <p:nvGrpSpPr>
-        <p:cNvPr id="1" name=""/>
-        <p:cNvGrpSpPr/>
-        <p:nvPr/>
-      </p:nvGrpSpPr>
-      <p:grpSpPr>
-        <a:xfrm>
-          <a:off x="0" y="0"/>
-          <a:ext cx="0" cy="0"/>
-          <a:chOff x="0" y="0"/>
-          <a:chExt cx="0" cy="0"/>
-        </a:xfrm>
-      </p:grpSpPr>
-      <p:sp>
-        <p:nvSpPr>
-          <p:cNvPr id="2" name="Header Placeholder 1"/>
-          <p:cNvSpPr>
-            <a:spLocks noGrp="1"/>
-          </p:cNvSpPr>
-          <p:nvPr>
-            <p:ph type="hdr" sz="quarter"/>
-          </p:nvPr>
-        </p:nvSpPr>
-        <p:spPr>
-          <a:xfrm>
-            <a:off x="0" y="0"/>
-            <a:ext cx="2971800" cy="457200"/>
-          </a:xfrm>
-          <a:prstGeom prst="rect">
-            <a:avLst/>
-          </a:prstGeom>
-        </p:spPr>
-        <p:txBody>
-          <a:bodyPr vert="horz" lIns="91440" tIns="45720" rIns="91440" bIns="45720" rtlCol="0"/>
-          <a:lstStyle>
-            <a:lvl1pPr algn="l">
-              <a:defRPr sz="1200"/>
-            </a:lvl1pPr>
-          </a:lstStyle>
-          <a:p>
-            <a:endParaRPr lang="en-US"/>
-          </a:p>
-        </p:txBody>
-      </p:sp>
-      <p:sp>
-        <p:nvSpPr>
-          <p:cNvPr id="3" name="Date Placeholder 2"/>
-          <p:cNvSpPr>
-            <a:spLocks noGrp="1"/>
-          </p:cNvSpPr>
-          <p:nvPr>
-            <p:ph type="dt" sz="quarter" idx="1"/>
-          </p:nvPr>
-        </p:nvSpPr>
-        <p:spPr>
-          <a:xfrm>
-            <a:off x="3884613" y="0"/>
-            <a:ext cx="2971800" cy="457200"/>
-          </a:xfrm>
-          <a:prstGeom prst="rect">
-            <a:avLst/>
-          </a:prstGeom>
-        </p:spPr>
-        <p:txBody>
-          <a:bodyPr vert="horz" lIns="91440" tIns="45720" rIns="91440" bIns="45720" rtlCol="0"/>
-          <a:lstStyle>
-            <a:lvl1pPr algn="r">
-              <a:defRPr sz="1200"/>
-            </a:lvl1pPr>
-          </a:lstStyle>
-          <a:p>
-            <a:fld id="{08BD4FA9-F3CE-45B3-A980-C331C6F1EF65}" type="datetimeFigureOut">
-              <a:rPr lang="en-US" smtClean="0"/>
-              <a:t>3/28/2023</a:t>
-            </a:fld>
-            <a:endParaRPr lang="en-US"/>
-          </a:p>
-        </p:txBody>
-      </p:sp>
-      <p:sp>
-        <p:nvSpPr>
-          <p:cNvPr id="4" name="Footer Placeholder 3"/>
-          <p:cNvSpPr>
-            <a:spLocks noGrp="1"/>
-          </p:cNvSpPr>
-          <p:nvPr>
-            <p:ph type="ftr" sz="quarter" idx="2"/>
-          </p:nvPr>
-        </p:nvSpPr>
-        <p:spPr>
-          <a:xfrm>
-            <a:off x="0" y="8685213"/>
-            <a:ext cx="2971800" cy="457200"/>
-          </a:xfrm>
-          <a:prstGeom prst="rect">
-            <a:avLst/>
-          </a:prstGeom>
-        </p:spPr>
-        <p:txBody>
-          <a:bodyPr vert="horz" lIns="91440" tIns="45720" rIns="91440" bIns="45720" rtlCol="0" anchor="b"/>
-          <a:lstStyle>
-            <a:lvl1pPr algn="l">
-              <a:defRPr sz="1200"/>
-            </a:lvl1pPr>
-          </a:lstStyle>
-          <a:p>
-            <a:endParaRPr lang="en-US"/>
-          </a:p>
-        </p:txBody>
-      </p:sp>
-      <p:sp>
-        <p:nvSpPr>
-          <p:cNvPr id="5" name="Slide Number Placeholder 4"/>
-          <p:cNvSpPr>
-            <a:spLocks noGrp="1"/>
-          </p:cNvSpPr>
-          <p:nvPr>
-            <p:ph type="sldNum" sz="quarter" idx="3"/>
-          </p:nvPr>
-        </p:nvSpPr>
-        <p:spPr>
-          <a:xfrm>
-            <a:off x="3884613" y="8685213"/>
-            <a:ext cx="2971800" cy="457200"/>
-          </a:xfrm>
-          <a:prstGeom prst="rect">
-            <a:avLst/>
-          </a:prstGeom>
-        </p:spPr>
-        <p:txBody>
-          <a:bodyPr vert="horz" lIns="91440" tIns="45720" rIns="91440" bIns="45720" rtlCol="0" anchor="b"/>
-          <a:lstStyle>
-            <a:lvl1pPr algn="r">
-              <a:defRPr sz="1200"/>
-            </a:lvl1pPr>
-          </a:lstStyle>
-          <a:p>
-            <a:fld id="{C7CD5E95-8CAD-4274-BFFA-CD87442DEA8C}" type="slidenum">
-              <a:rPr lang="en-US" smtClean="0"/>
-              <a:t>‹#›</a:t>
-            </a:fld>
-            <a:endParaRPr lang="en-US"/>
-          </a:p>
-        </p:txBody>
-      </p:sp>
-    </p:spTree>
-    <p:extLst>
-      <p:ext uri="{BB962C8B-B14F-4D97-AF65-F5344CB8AC3E}">
-        <p14:creationId xmlns:p14="http://schemas.microsoft.com/office/powerpoint/2010/main" val="1310769078"/>
-      </p:ext>
-    </p:extLst>
-  </p:cSld>
-  <p:clrMap bg1="lt1" tx1="dk1" bg2="lt2" tx2="dk2" accent1="accent1" accent2="accent2" accent3="accent3" accent4="accent4" accent5="accent5" accent6="accent6" hlink="hlink" folHlink="folHlink"/>
-</p:handoutMaster>
-</file>
-
-<file path=ppt/slideLayouts/slideLayout1.xml><?xml version="1.0" encoding="utf-8"?>
+<file path=ppt\slideLayouts\slideLayout1.xml><?xml version="1.0" encoding="utf-8"?>
 <p:sldLayout xmlns:a="http://schemas.openxmlformats.org/drawingml/2006/main" xmlns:r="http://schemas.openxmlformats.org/officeDocument/2006/relationships" xmlns:p="http://schemas.openxmlformats.org/presentationml/2006/main" type="title" preserve="1">
   <p:cSld name="Title Slide">
     <p:spTree>
@@ -763,7 +934,7 @@
 </p:sldLayout>
 </file>
 
-<file path=ppt/slideLayouts/slideLayout10.xml><?xml version="1.0" encoding="utf-8"?>
+<file path=ppt\slideLayouts\slideLayout10.xml><?xml version="1.0" encoding="utf-8"?>
 <p:sldLayout xmlns:a="http://schemas.openxmlformats.org/drawingml/2006/main" xmlns:r="http://schemas.openxmlformats.org/officeDocument/2006/relationships" xmlns:p="http://schemas.openxmlformats.org/presentationml/2006/main" type="vertTx" preserve="1">
   <p:cSld name="Title and Vertical Text">
     <p:spTree>
@@ -931,7 +1102,7 @@
 </p:sldLayout>
 </file>
 
-<file path=ppt/slideLayouts/slideLayout11.xml><?xml version="1.0" encoding="utf-8"?>
+<file path=ppt\slideLayouts\slideLayout11.xml><?xml version="1.0" encoding="utf-8"?>
 <p:sldLayout xmlns:a="http://schemas.openxmlformats.org/drawingml/2006/main" xmlns:r="http://schemas.openxmlformats.org/officeDocument/2006/relationships" xmlns:p="http://schemas.openxmlformats.org/presentationml/2006/main" type="vertTitleAndTx" preserve="1">
   <p:cSld name="Vertical Title and Text">
     <p:spTree>
@@ -1109,7 +1280,7 @@
 </p:sldLayout>
 </file>
 
-<file path=ppt/slideLayouts/slideLayout2.xml><?xml version="1.0" encoding="utf-8"?>
+<file path=ppt\slideLayouts\slideLayout2.xml><?xml version="1.0" encoding="utf-8"?>
 <p:sldLayout xmlns:a="http://schemas.openxmlformats.org/drawingml/2006/main" xmlns:r="http://schemas.openxmlformats.org/officeDocument/2006/relationships" xmlns:p="http://schemas.openxmlformats.org/presentationml/2006/main" type="obj" preserve="1">
   <p:cSld name="Title and Content">
     <p:spTree>
@@ -1294,7 +1465,7 @@
 </p:sldLayout>
 </file>
 
-<file path=ppt/slideLayouts/slideLayout3.xml><?xml version="1.0" encoding="utf-8"?>
+<file path=ppt\slideLayouts\slideLayout3.xml><?xml version="1.0" encoding="utf-8"?>
 <p:sldLayout xmlns:a="http://schemas.openxmlformats.org/drawingml/2006/main" xmlns:r="http://schemas.openxmlformats.org/officeDocument/2006/relationships" xmlns:p="http://schemas.openxmlformats.org/presentationml/2006/main" type="secHead" preserve="1">
   <p:cSld name="Section Header">
     <p:spTree>
@@ -1539,7 +1710,7 @@
 </p:sldLayout>
 </file>
 
-<file path=ppt/slideLayouts/slideLayout4.xml><?xml version="1.0" encoding="utf-8"?>
+<file path=ppt\slideLayouts\slideLayout4.xml><?xml version="1.0" encoding="utf-8"?>
 <p:sldLayout xmlns:a="http://schemas.openxmlformats.org/drawingml/2006/main" xmlns:r="http://schemas.openxmlformats.org/officeDocument/2006/relationships" xmlns:p="http://schemas.openxmlformats.org/presentationml/2006/main" type="twoObj" preserve="1">
   <p:cSld name="Two Content">
     <p:spTree>
@@ -1824,7 +1995,7 @@
 </p:sldLayout>
 </file>
 
-<file path=ppt/slideLayouts/slideLayout5.xml><?xml version="1.0" encoding="utf-8"?>
+<file path=ppt\slideLayouts\slideLayout5.xml><?xml version="1.0" encoding="utf-8"?>
 <p:sldLayout xmlns:a="http://schemas.openxmlformats.org/drawingml/2006/main" xmlns:r="http://schemas.openxmlformats.org/officeDocument/2006/relationships" xmlns:p="http://schemas.openxmlformats.org/presentationml/2006/main" type="twoTxTwoObj" preserve="1">
   <p:cSld name="Comparison">
     <p:spTree>
@@ -2243,7 +2414,7 @@
 </p:sldLayout>
 </file>
 
-<file path=ppt/slideLayouts/slideLayout6.xml><?xml version="1.0" encoding="utf-8"?>
+<file path=ppt\slideLayouts\slideLayout6.xml><?xml version="1.0" encoding="utf-8"?>
 <p:sldLayout xmlns:a="http://schemas.openxmlformats.org/drawingml/2006/main" xmlns:r="http://schemas.openxmlformats.org/officeDocument/2006/relationships" xmlns:p="http://schemas.openxmlformats.org/presentationml/2006/main" type="titleOnly" preserve="1">
   <p:cSld name="Title Only">
     <p:spTree>
@@ -2360,7 +2531,7 @@
 </p:sldLayout>
 </file>
 
-<file path=ppt/slideLayouts/slideLayout7.xml><?xml version="1.0" encoding="utf-8"?>
+<file path=ppt\slideLayouts\slideLayout7.xml><?xml version="1.0" encoding="utf-8"?>
 <p:sldLayout xmlns:a="http://schemas.openxmlformats.org/drawingml/2006/main" xmlns:r="http://schemas.openxmlformats.org/officeDocument/2006/relationships" xmlns:p="http://schemas.openxmlformats.org/presentationml/2006/main" type="blank" preserve="1">
   <p:cSld name="Blank">
     <p:spTree>
@@ -2455,7 +2626,7 @@
 </p:sldLayout>
 </file>
 
-<file path=ppt/slideLayouts/slideLayout8.xml><?xml version="1.0" encoding="utf-8"?>
+<file path=ppt\slideLayouts\slideLayout8.xml><?xml version="1.0" encoding="utf-8"?>
 <p:sldLayout xmlns:a="http://schemas.openxmlformats.org/drawingml/2006/main" xmlns:r="http://schemas.openxmlformats.org/officeDocument/2006/relationships" xmlns:p="http://schemas.openxmlformats.org/presentationml/2006/main" type="objTx" preserve="1">
   <p:cSld name="Content with Caption">
     <p:spTree>
@@ -2730,7 +2901,7 @@
 </p:sldLayout>
 </file>
 
-<file path=ppt/slideLayouts/slideLayout9.xml><?xml version="1.0" encoding="utf-8"?>
+<file path=ppt\slideLayouts\slideLayout9.xml><?xml version="1.0" encoding="utf-8"?>
 <p:sldLayout xmlns:a="http://schemas.openxmlformats.org/drawingml/2006/main" xmlns:r="http://schemas.openxmlformats.org/officeDocument/2006/relationships" xmlns:p="http://schemas.openxmlformats.org/presentationml/2006/main" type="picTx" preserve="1">
   <p:cSld name="Picture with Caption">
     <p:spTree>
@@ -2982,7 +3153,7 @@
 </p:sldLayout>
 </file>
 
-<file path=ppt/slideMasters/slideMaster1.xml><?xml version="1.0" encoding="utf-8"?>
+<file path=ppt\slideMasters\slideMaster1.xml><?xml version="1.0" encoding="utf-8"?>
 <p:sldMaster xmlns:a="http://schemas.openxmlformats.org/drawingml/2006/main" xmlns:r="http://schemas.openxmlformats.org/officeDocument/2006/relationships" xmlns:p="http://schemas.openxmlformats.org/presentationml/2006/main" preserve="1">
   <p:cSld>
     <p:bg>
@@ -3502,7 +3673,7 @@
 </p:sldMaster>
 </file>
 
-<file path=ppt/slides/slide1.xml><?xml version="1.0" encoding="utf-8"?>
+<file path=ppt\slides\slide1.xml><?xml version="1.0" encoding="utf-8"?>
 <p:sld xmlns:a="http://schemas.openxmlformats.org/drawingml/2006/main" xmlns:r="http://schemas.openxmlformats.org/officeDocument/2006/relationships" xmlns:p="http://schemas.openxmlformats.org/presentationml/2006/main">
   <p:cSld>
     <p:bg>
@@ -3810,7 +3981,7 @@
 </p:sld>
 </file>
 
-<file path=ppt/slides/slide10.xml><?xml version="1.0" encoding="utf-8"?>
+<file path=ppt\slides\slide10.xml><?xml version="1.0" encoding="utf-8"?>
 <p:sld xmlns:a="http://schemas.openxmlformats.org/drawingml/2006/main" xmlns:r="http://schemas.openxmlformats.org/officeDocument/2006/relationships" xmlns:p="http://schemas.openxmlformats.org/presentationml/2006/main">
   <p:cSld>
     <p:spTree>
@@ -4014,7 +4185,7 @@
 </p:sld>
 </file>
 
-<file path=ppt/slides/slide11.xml><?xml version="1.0" encoding="utf-8"?>
+<file path=ppt\slides\slide11.xml><?xml version="1.0" encoding="utf-8"?>
 <p:sld xmlns:a="http://schemas.openxmlformats.org/drawingml/2006/main" xmlns:r="http://schemas.openxmlformats.org/officeDocument/2006/relationships" xmlns:p="http://schemas.openxmlformats.org/presentationml/2006/main">
   <p:cSld>
     <p:spTree>
@@ -5070,7 +5241,7 @@
 </p:sld>
 </file>
 
-<file path=ppt/slides/slide12.xml><?xml version="1.0" encoding="utf-8"?>
+<file path=ppt\slides\slide12.xml><?xml version="1.0" encoding="utf-8"?>
 <p:sld xmlns:a="http://schemas.openxmlformats.org/drawingml/2006/main" xmlns:r="http://schemas.openxmlformats.org/officeDocument/2006/relationships" xmlns:p="http://schemas.openxmlformats.org/presentationml/2006/main">
   <p:cSld>
     <p:spTree>
@@ -5710,7 +5881,7 @@
 </p:sld>
 </file>
 
-<file path=ppt/slides/slide13.xml><?xml version="1.0" encoding="utf-8"?>
+<file path=ppt\slides\slide13.xml><?xml version="1.0" encoding="utf-8"?>
 <p:sld xmlns:a="http://schemas.openxmlformats.org/drawingml/2006/main" xmlns:r="http://schemas.openxmlformats.org/officeDocument/2006/relationships" xmlns:p="http://schemas.openxmlformats.org/presentationml/2006/main">
   <p:cSld>
     <p:spTree>
@@ -5969,7 +6140,7 @@
 </p:sld>
 </file>
 
-<file path=ppt/slides/slide14.xml><?xml version="1.0" encoding="utf-8"?>
+<file path=ppt\slides\slide14.xml><?xml version="1.0" encoding="utf-8"?>
 <p:sld xmlns:a="http://schemas.openxmlformats.org/drawingml/2006/main" xmlns:r="http://schemas.openxmlformats.org/officeDocument/2006/relationships" xmlns:p="http://schemas.openxmlformats.org/presentationml/2006/main">
   <p:cSld>
     <p:spTree>
@@ -6193,7 +6364,7 @@
 </p:sld>
 </file>
 
-<file path=ppt/slides/slide15.xml><?xml version="1.0" encoding="utf-8"?>
+<file path=ppt\slides\slide15.xml><?xml version="1.0" encoding="utf-8"?>
 <p:sld xmlns:a="http://schemas.openxmlformats.org/drawingml/2006/main" xmlns:r="http://schemas.openxmlformats.org/officeDocument/2006/relationships" xmlns:p="http://schemas.openxmlformats.org/presentationml/2006/main">
   <p:cSld>
     <p:spTree>
@@ -6773,7 +6944,7 @@
 </p:sld>
 </file>
 
-<file path=ppt/slides/slide16.xml><?xml version="1.0" encoding="utf-8"?>
+<file path=ppt\slides\slide16.xml><?xml version="1.0" encoding="utf-8"?>
 <p:sld xmlns:a="http://schemas.openxmlformats.org/drawingml/2006/main" xmlns:r="http://schemas.openxmlformats.org/officeDocument/2006/relationships" xmlns:p="http://schemas.openxmlformats.org/presentationml/2006/main">
   <p:cSld>
     <p:spTree>
@@ -7069,7 +7240,7 @@
 </p:sld>
 </file>
 
-<file path=ppt/slides/slide17.xml><?xml version="1.0" encoding="utf-8"?>
+<file path=ppt\slides\slide17.xml><?xml version="1.0" encoding="utf-8"?>
 <p:sld xmlns:a="http://schemas.openxmlformats.org/drawingml/2006/main" xmlns:r="http://schemas.openxmlformats.org/officeDocument/2006/relationships" xmlns:p="http://schemas.openxmlformats.org/presentationml/2006/main">
   <p:cSld>
     <p:spTree>
@@ -7490,7 +7661,7 @@
 </p:sld>
 </file>
 
-<file path=ppt/slides/slide18.xml><?xml version="1.0" encoding="utf-8"?>
+<file path=ppt\slides\slide18.xml><?xml version="1.0" encoding="utf-8"?>
 <p:sld xmlns:a="http://schemas.openxmlformats.org/drawingml/2006/main" xmlns:r="http://schemas.openxmlformats.org/officeDocument/2006/relationships" xmlns:p="http://schemas.openxmlformats.org/presentationml/2006/main">
   <p:cSld>
     <p:spTree>
@@ -7609,7 +7780,7 @@
 </p:sld>
 </file>
 
-<file path=ppt/slides/slide19.xml><?xml version="1.0" encoding="utf-8"?>
+<file path=ppt\slides\slide19.xml><?xml version="1.0" encoding="utf-8"?>
 <p:sld xmlns:a="http://schemas.openxmlformats.org/drawingml/2006/main" xmlns:r="http://schemas.openxmlformats.org/officeDocument/2006/relationships" xmlns:p="http://schemas.openxmlformats.org/presentationml/2006/main" show="0">
   <p:cSld>
     <p:spTree>
@@ -7758,7 +7929,7 @@
 </p:sld>
 </file>
 
-<file path=ppt/slides/slide2.xml><?xml version="1.0" encoding="utf-8"?>
+<file path=ppt\slides\slide2.xml><?xml version="1.0" encoding="utf-8"?>
 <p:sld xmlns:a="http://schemas.openxmlformats.org/drawingml/2006/main" xmlns:r="http://schemas.openxmlformats.org/officeDocument/2006/relationships" xmlns:p="http://schemas.openxmlformats.org/presentationml/2006/main">
   <p:cSld>
     <p:spTree>
@@ -7965,7 +8136,7 @@
 </p:sld>
 </file>
 
-<file path=ppt/slides/slide20.xml><?xml version="1.0" encoding="utf-8"?>
+<file path=ppt\slides\slide20.xml><?xml version="1.0" encoding="utf-8"?>
 <p:sld xmlns:a="http://schemas.openxmlformats.org/drawingml/2006/main" xmlns:r="http://schemas.openxmlformats.org/officeDocument/2006/relationships" xmlns:p="http://schemas.openxmlformats.org/presentationml/2006/main">
   <p:cSld>
     <p:spTree>
@@ -8189,7 +8360,7 @@
 </p:sld>
 </file>
 
-<file path=ppt/slides/slide21.xml><?xml version="1.0" encoding="utf-8"?>
+<file path=ppt\slides\slide21.xml><?xml version="1.0" encoding="utf-8"?>
 <p:sld xmlns:a="http://schemas.openxmlformats.org/drawingml/2006/main" xmlns:r="http://schemas.openxmlformats.org/officeDocument/2006/relationships" xmlns:p="http://schemas.openxmlformats.org/presentationml/2006/main">
   <p:cSld>
     <p:spTree>
@@ -8817,7 +8988,7 @@
 </p:sld>
 </file>
 
-<file path=ppt/slides/slide22.xml><?xml version="1.0" encoding="utf-8"?>
+<file path=ppt\slides\slide22.xml><?xml version="1.0" encoding="utf-8"?>
 <p:sld xmlns:a="http://schemas.openxmlformats.org/drawingml/2006/main" xmlns:r="http://schemas.openxmlformats.org/officeDocument/2006/relationships" xmlns:p="http://schemas.openxmlformats.org/presentationml/2006/main">
   <p:cSld>
     <p:spTree>
@@ -9175,7 +9346,7 @@
 </p:sld>
 </file>
 
-<file path=ppt/slides/slide23.xml><?xml version="1.0" encoding="utf-8"?>
+<file path=ppt\slides\slide23.xml><?xml version="1.0" encoding="utf-8"?>
 <p:sld xmlns:a="http://schemas.openxmlformats.org/drawingml/2006/main" xmlns:r="http://schemas.openxmlformats.org/officeDocument/2006/relationships" xmlns:p="http://schemas.openxmlformats.org/presentationml/2006/main">
   <p:cSld>
     <p:spTree>
@@ -9614,7 +9785,7 @@
 </p:sld>
 </file>
 
-<file path=ppt/slides/slide24.xml><?xml version="1.0" encoding="utf-8"?>
+<file path=ppt\slides\slide24.xml><?xml version="1.0" encoding="utf-8"?>
 <p:sld xmlns:a="http://schemas.openxmlformats.org/drawingml/2006/main" xmlns:r="http://schemas.openxmlformats.org/officeDocument/2006/relationships" xmlns:p="http://schemas.openxmlformats.org/presentationml/2006/main">
   <p:cSld>
     <p:spTree>
@@ -9752,7 +9923,7 @@
 </p:sld>
 </file>
 
-<file path=ppt/slides/slide25.xml><?xml version="1.0" encoding="utf-8"?>
+<file path=ppt\slides\slide25.xml><?xml version="1.0" encoding="utf-8"?>
 <p:sld xmlns:a="http://schemas.openxmlformats.org/drawingml/2006/main" xmlns:r="http://schemas.openxmlformats.org/officeDocument/2006/relationships" xmlns:p="http://schemas.openxmlformats.org/presentationml/2006/main">
   <p:cSld>
     <p:spTree>
@@ -10225,7 +10396,7 @@
 </p:sld>
 </file>
 
-<file path=ppt/slides/slide26.xml><?xml version="1.0" encoding="utf-8"?>
+<file path=ppt\slides\slide26.xml><?xml version="1.0" encoding="utf-8"?>
 <p:sld xmlns:a="http://schemas.openxmlformats.org/drawingml/2006/main" xmlns:r="http://schemas.openxmlformats.org/officeDocument/2006/relationships" xmlns:p="http://schemas.openxmlformats.org/presentationml/2006/main">
   <p:cSld>
     <p:spTree>
@@ -10344,7 +10515,7 @@
 </p:sld>
 </file>
 
-<file path=ppt/slides/slide27.xml><?xml version="1.0" encoding="utf-8"?>
+<file path=ppt\slides\slide27.xml><?xml version="1.0" encoding="utf-8"?>
 <p:sld xmlns:a="http://schemas.openxmlformats.org/drawingml/2006/main" xmlns:r="http://schemas.openxmlformats.org/officeDocument/2006/relationships" xmlns:p="http://schemas.openxmlformats.org/presentationml/2006/main">
   <p:cSld>
     <p:spTree>
@@ -10498,7 +10669,7 @@
 </p:sld>
 </file>
 
-<file path=ppt/slides/slide28.xml><?xml version="1.0" encoding="utf-8"?>
+<file path=ppt\slides\slide28.xml><?xml version="1.0" encoding="utf-8"?>
 <p:sld xmlns:a="http://schemas.openxmlformats.org/drawingml/2006/main" xmlns:r="http://schemas.openxmlformats.org/officeDocument/2006/relationships" xmlns:p="http://schemas.openxmlformats.org/presentationml/2006/main">
   <p:cSld>
     <p:spTree>
@@ -10632,7 +10803,7 @@
 </p:sld>
 </file>
 
-<file path=ppt/slides/slide29.xml><?xml version="1.0" encoding="utf-8"?>
+<file path=ppt\slides\slide29.xml><?xml version="1.0" encoding="utf-8"?>
 <p:sld xmlns:a="http://schemas.openxmlformats.org/drawingml/2006/main" xmlns:r="http://schemas.openxmlformats.org/officeDocument/2006/relationships" xmlns:p="http://schemas.openxmlformats.org/presentationml/2006/main">
   <p:cSld>
     <p:spTree>
@@ -11234,7 +11405,7 @@
 </p:sld>
 </file>
 
-<file path=ppt/slides/slide3.xml><?xml version="1.0" encoding="utf-8"?>
+<file path=ppt\slides\slide3.xml><?xml version="1.0" encoding="utf-8"?>
 <p:sld xmlns:a="http://schemas.openxmlformats.org/drawingml/2006/main" xmlns:r="http://schemas.openxmlformats.org/officeDocument/2006/relationships" xmlns:p="http://schemas.openxmlformats.org/presentationml/2006/main">
   <p:cSld>
     <p:spTree>
@@ -12101,7 +12272,7 @@
 </p:sld>
 </file>
 
-<file path=ppt/slides/slide30.xml><?xml version="1.0" encoding="utf-8"?>
+<file path=ppt\slides\slide30.xml><?xml version="1.0" encoding="utf-8"?>
 <p:sld xmlns:a="http://schemas.openxmlformats.org/drawingml/2006/main" xmlns:r="http://schemas.openxmlformats.org/officeDocument/2006/relationships" xmlns:p="http://schemas.openxmlformats.org/presentationml/2006/main">
   <p:cSld>
     <p:spTree>
@@ -12612,7 +12783,7 @@
 </p:sld>
 </file>
 
-<file path=ppt/slides/slide31.xml><?xml version="1.0" encoding="utf-8"?>
+<file path=ppt\slides\slide31.xml><?xml version="1.0" encoding="utf-8"?>
 <p:sld xmlns:a="http://schemas.openxmlformats.org/drawingml/2006/main" xmlns:r="http://schemas.openxmlformats.org/officeDocument/2006/relationships" xmlns:p="http://schemas.openxmlformats.org/presentationml/2006/main">
   <p:cSld>
     <p:spTree>
@@ -13154,7 +13325,7 @@
 </p:sld>
 </file>
 
-<file path=ppt/slides/slide32.xml><?xml version="1.0" encoding="utf-8"?>
+<file path=ppt\slides\slide32.xml><?xml version="1.0" encoding="utf-8"?>
 <p:sld xmlns:a="http://schemas.openxmlformats.org/drawingml/2006/main" xmlns:r="http://schemas.openxmlformats.org/officeDocument/2006/relationships" xmlns:p="http://schemas.openxmlformats.org/presentationml/2006/main">
   <p:cSld>
     <p:spTree>
@@ -13617,7 +13788,7 @@
 </p:sld>
 </file>
 
-<file path=ppt/slides/slide33.xml><?xml version="1.0" encoding="utf-8"?>
+<file path=ppt\slides\slide33.xml><?xml version="1.0" encoding="utf-8"?>
 <p:sld xmlns:a="http://schemas.openxmlformats.org/drawingml/2006/main" xmlns:r="http://schemas.openxmlformats.org/officeDocument/2006/relationships" xmlns:p="http://schemas.openxmlformats.org/presentationml/2006/main">
   <p:cSld>
     <p:spTree>
@@ -13835,7 +14006,7 @@
 </p:sld>
 </file>
 
-<file path=ppt/slides/slide34.xml><?xml version="1.0" encoding="utf-8"?>
+<file path=ppt\slides\slide34.xml><?xml version="1.0" encoding="utf-8"?>
 <p:sld xmlns:a="http://schemas.openxmlformats.org/drawingml/2006/main" xmlns:r="http://schemas.openxmlformats.org/officeDocument/2006/relationships" xmlns:p="http://schemas.openxmlformats.org/presentationml/2006/main">
   <p:cSld>
     <p:spTree>
@@ -14221,7 +14392,7 @@
 </p:sld>
 </file>
 
-<file path=ppt/slides/slide35.xml><?xml version="1.0" encoding="utf-8"?>
+<file path=ppt\slides\slide35.xml><?xml version="1.0" encoding="utf-8"?>
 <p:sld xmlns:a="http://schemas.openxmlformats.org/drawingml/2006/main" xmlns:r="http://schemas.openxmlformats.org/officeDocument/2006/relationships" xmlns:p="http://schemas.openxmlformats.org/presentationml/2006/main">
   <p:cSld>
     <p:spTree>
@@ -14526,7 +14697,7 @@
 </p:sld>
 </file>
 
-<file path=ppt/slides/slide36.xml><?xml version="1.0" encoding="utf-8"?>
+<file path=ppt\slides\slide36.xml><?xml version="1.0" encoding="utf-8"?>
 <p:sld xmlns:a="http://schemas.openxmlformats.org/drawingml/2006/main" xmlns:r="http://schemas.openxmlformats.org/officeDocument/2006/relationships" xmlns:p="http://schemas.openxmlformats.org/presentationml/2006/main">
   <p:cSld>
     <p:spTree>
@@ -14736,7 +14907,7 @@
 </p:sld>
 </file>
 
-<file path=ppt/slides/slide37.xml><?xml version="1.0" encoding="utf-8"?>
+<file path=ppt\slides\slide37.xml><?xml version="1.0" encoding="utf-8"?>
 <p:sld xmlns:a="http://schemas.openxmlformats.org/drawingml/2006/main" xmlns:r="http://schemas.openxmlformats.org/officeDocument/2006/relationships" xmlns:p="http://schemas.openxmlformats.org/presentationml/2006/main">
   <p:cSld>
     <p:spTree>
@@ -14926,7 +15097,7 @@
 </p:sld>
 </file>
 
-<file path=ppt/slides/slide38.xml><?xml version="1.0" encoding="utf-8"?>
+<file path=ppt\slides\slide38.xml><?xml version="1.0" encoding="utf-8"?>
 <p:sld xmlns:a="http://schemas.openxmlformats.org/drawingml/2006/main" xmlns:r="http://schemas.openxmlformats.org/officeDocument/2006/relationships" xmlns:p="http://schemas.openxmlformats.org/presentationml/2006/main">
   <p:cSld>
     <p:spTree>
@@ -15189,7 +15360,7 @@
 </p:sld>
 </file>
 
-<file path=ppt/slides/slide39.xml><?xml version="1.0" encoding="utf-8"?>
+<file path=ppt\slides\slide39.xml><?xml version="1.0" encoding="utf-8"?>
 <p:sld xmlns:a="http://schemas.openxmlformats.org/drawingml/2006/main" xmlns:r="http://schemas.openxmlformats.org/officeDocument/2006/relationships" xmlns:p="http://schemas.openxmlformats.org/presentationml/2006/main">
   <p:cSld>
     <p:spTree>
@@ -16169,7 +16340,7 @@
 </p:sld>
 </file>
 
-<file path=ppt/slides/slide4.xml><?xml version="1.0" encoding="utf-8"?>
+<file path=ppt\slides\slide4.xml><?xml version="1.0" encoding="utf-8"?>
 <p:sld xmlns:a="http://schemas.openxmlformats.org/drawingml/2006/main" xmlns:r="http://schemas.openxmlformats.org/officeDocument/2006/relationships" xmlns:p="http://schemas.openxmlformats.org/presentationml/2006/main">
   <p:cSld>
     <p:spTree>
@@ -16514,7 +16685,7 @@
 </p:sld>
 </file>
 
-<file path=ppt/slides/slide40.xml><?xml version="1.0" encoding="utf-8"?>
+<file path=ppt\slides\slide40.xml><?xml version="1.0" encoding="utf-8"?>
 <p:sld xmlns:a="http://schemas.openxmlformats.org/drawingml/2006/main" xmlns:r="http://schemas.openxmlformats.org/officeDocument/2006/relationships" xmlns:p="http://schemas.openxmlformats.org/presentationml/2006/main">
   <p:cSld>
     <p:spTree>
@@ -16864,7 +17035,7 @@
 </p:sld>
 </file>
 
-<file path=ppt/slides/slide41.xml><?xml version="1.0" encoding="utf-8"?>
+<file path=ppt\slides\slide41.xml><?xml version="1.0" encoding="utf-8"?>
 <p:sld xmlns:a="http://schemas.openxmlformats.org/drawingml/2006/main" xmlns:r="http://schemas.openxmlformats.org/officeDocument/2006/relationships" xmlns:p="http://schemas.openxmlformats.org/presentationml/2006/main">
   <p:cSld>
     <p:spTree>
@@ -17010,7 +17181,7 @@
 </p:sld>
 </file>
 
-<file path=ppt/slides/slide42.xml><?xml version="1.0" encoding="utf-8"?>
+<file path=ppt\slides\slide42.xml><?xml version="1.0" encoding="utf-8"?>
 <p:sld xmlns:a="http://schemas.openxmlformats.org/drawingml/2006/main" xmlns:r="http://schemas.openxmlformats.org/officeDocument/2006/relationships" xmlns:p="http://schemas.openxmlformats.org/presentationml/2006/main">
   <p:cSld>
     <p:spTree>
@@ -17321,7 +17492,7 @@
 </p:sld>
 </file>
 
-<file path=ppt/slides/slide43.xml><?xml version="1.0" encoding="utf-8"?>
+<file path=ppt\slides\slide43.xml><?xml version="1.0" encoding="utf-8"?>
 <p:sld xmlns:a="http://schemas.openxmlformats.org/drawingml/2006/main" xmlns:r="http://schemas.openxmlformats.org/officeDocument/2006/relationships" xmlns:p="http://schemas.openxmlformats.org/presentationml/2006/main">
   <p:cSld>
     <p:spTree>
@@ -17438,13 +17609,13 @@
               <a:rPr lang="el-GR" dirty="0">
                 <a:latin typeface="Calibri" panose="020F0502020204030204" pitchFamily="34" charset="0"/>
                 <a:cs typeface="Calibri" panose="020F0502020204030204" pitchFamily="34" charset="0"/>
-                <a:sym typeface="Symbol MT" panose="05050102010706020507" pitchFamily="18" charset="2"/>
+                <a:sym typeface="Symbol" panose="05050102010706020507" pitchFamily="18" charset="2"/>
               </a:rPr>
               <a:t>φ</a:t>
             </a:r>
             <a:r>
               <a:rPr lang="en-US" dirty="0">
-                <a:sym typeface="Symbol MT" panose="05050102010706020507" pitchFamily="18" charset="2"/>
+                <a:sym typeface="Symbol" panose="05050102010706020507" pitchFamily="18" charset="2"/>
               </a:rPr>
               <a:t> × f(</a:t>
             </a:r>
@@ -17576,7 +17747,7 @@
 </p:sld>
 </file>
 
-<file path=ppt/slides/slide44.xml><?xml version="1.0" encoding="utf-8"?>
+<file path=ppt\slides\slide44.xml><?xml version="1.0" encoding="utf-8"?>
 <p:sld xmlns:a="http://schemas.openxmlformats.org/drawingml/2006/main" xmlns:r="http://schemas.openxmlformats.org/officeDocument/2006/relationships" xmlns:p="http://schemas.openxmlformats.org/presentationml/2006/main">
   <p:cSld>
     <p:spTree>
@@ -18406,7 +18577,7 @@
 </p:sld>
 </file>
 
-<file path=ppt/slides/slide45.xml><?xml version="1.0" encoding="utf-8"?>
+<file path=ppt\slides\slide45.xml><?xml version="1.0" encoding="utf-8"?>
 <p:sld xmlns:a="http://schemas.openxmlformats.org/drawingml/2006/main" xmlns:r="http://schemas.openxmlformats.org/officeDocument/2006/relationships" xmlns:p="http://schemas.openxmlformats.org/presentationml/2006/main">
   <p:cSld>
     <p:spTree>
@@ -18797,7 +18968,7 @@
 </p:sld>
 </file>
 
-<file path=ppt/slides/slide46.xml><?xml version="1.0" encoding="utf-8"?>
+<file path=ppt\slides\slide46.xml><?xml version="1.0" encoding="utf-8"?>
 <p:sld xmlns:a="http://schemas.openxmlformats.org/drawingml/2006/main" xmlns:r="http://schemas.openxmlformats.org/officeDocument/2006/relationships" xmlns:p="http://schemas.openxmlformats.org/presentationml/2006/main">
   <p:cSld>
     <p:spTree>
@@ -19190,7 +19361,7 @@
 </p:sld>
 </file>
 
-<file path=ppt/slides/slide47.xml><?xml version="1.0" encoding="utf-8"?>
+<file path=ppt\slides\slide47.xml><?xml version="1.0" encoding="utf-8"?>
 <p:sld xmlns:a="http://schemas.openxmlformats.org/drawingml/2006/main" xmlns:r="http://schemas.openxmlformats.org/officeDocument/2006/relationships" xmlns:p="http://schemas.openxmlformats.org/presentationml/2006/main">
   <p:cSld>
     <p:spTree>
@@ -19658,7 +19829,7 @@
 </p:sld>
 </file>
 
-<file path=ppt/slides/slide48.xml><?xml version="1.0" encoding="utf-8"?>
+<file path=ppt\slides\slide48.xml><?xml version="1.0" encoding="utf-8"?>
 <p:sld xmlns:a="http://schemas.openxmlformats.org/drawingml/2006/main" xmlns:r="http://schemas.openxmlformats.org/officeDocument/2006/relationships" xmlns:p="http://schemas.openxmlformats.org/presentationml/2006/main">
   <p:cSld>
     <p:spTree>
@@ -19777,7 +19948,7 @@
 </p:sld>
 </file>
 
-<file path=ppt/slides/slide49.xml><?xml version="1.0" encoding="utf-8"?>
+<file path=ppt\slides\slide49.xml><?xml version="1.0" encoding="utf-8"?>
 <p:sld xmlns:a="http://schemas.openxmlformats.org/drawingml/2006/main" xmlns:r="http://schemas.openxmlformats.org/officeDocument/2006/relationships" xmlns:p="http://schemas.openxmlformats.org/presentationml/2006/main">
   <p:cSld>
     <p:spTree>
@@ -19959,7 +20130,7 @@
 </p:sld>
 </file>
 
-<file path=ppt/slides/slide5.xml><?xml version="1.0" encoding="utf-8"?>
+<file path=ppt\slides\slide5.xml><?xml version="1.0" encoding="utf-8"?>
 <p:sld xmlns:a="http://schemas.openxmlformats.org/drawingml/2006/main" xmlns:r="http://schemas.openxmlformats.org/officeDocument/2006/relationships" xmlns:p="http://schemas.openxmlformats.org/presentationml/2006/main">
   <p:cSld>
     <p:spTree>
@@ -20240,7 +20411,7 @@
 </p:sld>
 </file>
 
-<file path=ppt/slides/slide50.xml><?xml version="1.0" encoding="utf-8"?>
+<file path=ppt\slides\slide50.xml><?xml version="1.0" encoding="utf-8"?>
 <p:sld xmlns:a="http://schemas.openxmlformats.org/drawingml/2006/main" xmlns:r="http://schemas.openxmlformats.org/officeDocument/2006/relationships" xmlns:p="http://schemas.openxmlformats.org/presentationml/2006/main">
   <p:cSld>
     <p:spTree>
@@ -20569,7 +20740,7 @@
 </p:sld>
 </file>
 
-<file path=ppt/slides/slide51.xml><?xml version="1.0" encoding="utf-8"?>
+<file path=ppt\slides\slide51.xml><?xml version="1.0" encoding="utf-8"?>
 <p:sld xmlns:a="http://schemas.openxmlformats.org/drawingml/2006/main" xmlns:r="http://schemas.openxmlformats.org/officeDocument/2006/relationships" xmlns:p="http://schemas.openxmlformats.org/presentationml/2006/main">
   <p:cSld>
     <p:spTree>
@@ -20889,7 +21060,7 @@
 </p:sld>
 </file>
 
-<file path=ppt/slides/slide52.xml><?xml version="1.0" encoding="utf-8"?>
+<file path=ppt\slides\slide52.xml><?xml version="1.0" encoding="utf-8"?>
 <p:sld xmlns:a="http://schemas.openxmlformats.org/drawingml/2006/main" xmlns:r="http://schemas.openxmlformats.org/officeDocument/2006/relationships" xmlns:p="http://schemas.openxmlformats.org/presentationml/2006/main">
   <p:cSld>
     <p:spTree>
@@ -21648,7 +21819,7 @@
 </p:sld>
 </file>
 
-<file path=ppt/slides/slide53.xml><?xml version="1.0" encoding="utf-8"?>
+<file path=ppt\slides\slide53.xml><?xml version="1.0" encoding="utf-8"?>
 <p:sld xmlns:a="http://schemas.openxmlformats.org/drawingml/2006/main" xmlns:r="http://schemas.openxmlformats.org/officeDocument/2006/relationships" xmlns:p="http://schemas.openxmlformats.org/presentationml/2006/main">
   <p:cSld>
     <p:spTree>
@@ -21802,7 +21973,7 @@
 </p:sld>
 </file>
 
-<file path=ppt/slides/slide54.xml><?xml version="1.0" encoding="utf-8"?>
+<file path=ppt\slides\slide54.xml><?xml version="1.0" encoding="utf-8"?>
 <p:sld xmlns:a="http://schemas.openxmlformats.org/drawingml/2006/main" xmlns:r="http://schemas.openxmlformats.org/officeDocument/2006/relationships" xmlns:p="http://schemas.openxmlformats.org/presentationml/2006/main">
   <p:cSld>
     <p:spTree>
@@ -22548,7 +22719,7 @@
 </p:sld>
 </file>
 
-<file path=ppt/slides/slide55.xml><?xml version="1.0" encoding="utf-8"?>
+<file path=ppt\slides\slide55.xml><?xml version="1.0" encoding="utf-8"?>
 <p:sld xmlns:a="http://schemas.openxmlformats.org/drawingml/2006/main" xmlns:r="http://schemas.openxmlformats.org/officeDocument/2006/relationships" xmlns:p="http://schemas.openxmlformats.org/presentationml/2006/main">
   <p:cSld>
     <p:spTree>
@@ -23122,7 +23293,7 @@
 </p:sld>
 </file>
 
-<file path=ppt/slides/slide56.xml><?xml version="1.0" encoding="utf-8"?>
+<file path=ppt\slides\slide56.xml><?xml version="1.0" encoding="utf-8"?>
 <p:sld xmlns:a="http://schemas.openxmlformats.org/drawingml/2006/main" xmlns:r="http://schemas.openxmlformats.org/officeDocument/2006/relationships" xmlns:p="http://schemas.openxmlformats.org/presentationml/2006/main">
   <p:cSld>
     <p:spTree>
@@ -23427,7 +23598,7 @@
 </p:sld>
 </file>
 
-<file path=ppt/slides/slide57.xml><?xml version="1.0" encoding="utf-8"?>
+<file path=ppt\slides\slide57.xml><?xml version="1.0" encoding="utf-8"?>
 <p:sld xmlns:a="http://schemas.openxmlformats.org/drawingml/2006/main" xmlns:r="http://schemas.openxmlformats.org/officeDocument/2006/relationships" xmlns:p="http://schemas.openxmlformats.org/presentationml/2006/main">
   <p:cSld>
     <p:spTree>
@@ -23921,7 +24092,7 @@
 </p:sld>
 </file>
 
-<file path=ppt/slides/slide58.xml><?xml version="1.0" encoding="utf-8"?>
+<file path=ppt\slides\slide58.xml><?xml version="1.0" encoding="utf-8"?>
 <p:sld xmlns:a="http://schemas.openxmlformats.org/drawingml/2006/main" xmlns:r="http://schemas.openxmlformats.org/officeDocument/2006/relationships" xmlns:p="http://schemas.openxmlformats.org/presentationml/2006/main">
   <p:cSld>
     <p:spTree>
@@ -24447,7 +24618,7 @@
 </p:sld>
 </file>
 
-<file path=ppt/slides/slide59.xml><?xml version="1.0" encoding="utf-8"?>
+<file path=ppt\slides\slide59.xml><?xml version="1.0" encoding="utf-8"?>
 <p:sld xmlns:a="http://schemas.openxmlformats.org/drawingml/2006/main" xmlns:r="http://schemas.openxmlformats.org/officeDocument/2006/relationships" xmlns:p="http://schemas.openxmlformats.org/presentationml/2006/main">
   <p:cSld>
     <p:spTree>
@@ -24862,7 +25033,7 @@
 </p:sld>
 </file>
 
-<file path=ppt/slides/slide6.xml><?xml version="1.0" encoding="utf-8"?>
+<file path=ppt\slides\slide6.xml><?xml version="1.0" encoding="utf-8"?>
 <p:sld xmlns:a="http://schemas.openxmlformats.org/drawingml/2006/main" xmlns:r="http://schemas.openxmlformats.org/officeDocument/2006/relationships" xmlns:p="http://schemas.openxmlformats.org/presentationml/2006/main">
   <p:cSld>
     <p:spTree>
@@ -25161,7 +25332,7 @@
 </p:sld>
 </file>
 
-<file path=ppt/slides/slide60.xml><?xml version="1.0" encoding="utf-8"?>
+<file path=ppt\slides\slide60.xml><?xml version="1.0" encoding="utf-8"?>
 <p:sld xmlns:a="http://schemas.openxmlformats.org/drawingml/2006/main" xmlns:r="http://schemas.openxmlformats.org/officeDocument/2006/relationships" xmlns:p="http://schemas.openxmlformats.org/presentationml/2006/main">
   <p:cSld>
     <p:spTree>
@@ -25490,7 +25661,7 @@
 </p:sld>
 </file>
 
-<file path=ppt/slides/slide61.xml><?xml version="1.0" encoding="utf-8"?>
+<file path=ppt\slides\slide61.xml><?xml version="1.0" encoding="utf-8"?>
 <p:sld xmlns:a="http://schemas.openxmlformats.org/drawingml/2006/main" xmlns:r="http://schemas.openxmlformats.org/officeDocument/2006/relationships" xmlns:p="http://schemas.openxmlformats.org/presentationml/2006/main">
   <p:cSld>
     <p:spTree>
@@ -25886,7 +26057,7 @@
 </p:sld>
 </file>
 
-<file path=ppt/slides/slide62.xml><?xml version="1.0" encoding="utf-8"?>
+<file path=ppt\slides\slide62.xml><?xml version="1.0" encoding="utf-8"?>
 <p:sld xmlns:a="http://schemas.openxmlformats.org/drawingml/2006/main" xmlns:r="http://schemas.openxmlformats.org/officeDocument/2006/relationships" xmlns:p="http://schemas.openxmlformats.org/presentationml/2006/main">
   <p:cSld>
     <p:spTree>
@@ -26005,7 +26176,7 @@
 </p:sld>
 </file>
 
-<file path=ppt/slides/slide63.xml><?xml version="1.0" encoding="utf-8"?>
+<file path=ppt\slides\slide63.xml><?xml version="1.0" encoding="utf-8"?>
 <p:sld xmlns:a="http://schemas.openxmlformats.org/drawingml/2006/main" xmlns:r="http://schemas.openxmlformats.org/officeDocument/2006/relationships" xmlns:p="http://schemas.openxmlformats.org/presentationml/2006/main">
   <p:cSld>
     <p:spTree>
@@ -26351,7 +26522,7 @@
 </p:sld>
 </file>
 
-<file path=ppt/slides/slide64.xml><?xml version="1.0" encoding="utf-8"?>
+<file path=ppt\slides\slide64.xml><?xml version="1.0" encoding="utf-8"?>
 <p:sld xmlns:a="http://schemas.openxmlformats.org/drawingml/2006/main" xmlns:r="http://schemas.openxmlformats.org/officeDocument/2006/relationships" xmlns:p="http://schemas.openxmlformats.org/presentationml/2006/main">
   <p:cSld>
     <p:spTree>
@@ -26530,7 +26701,7 @@
 </p:sld>
 </file>
 
-<file path=ppt/slides/slide65.xml><?xml version="1.0" encoding="utf-8"?>
+<file path=ppt\slides\slide65.xml><?xml version="1.0" encoding="utf-8"?>
 <p:sld xmlns:a="http://schemas.openxmlformats.org/drawingml/2006/main" xmlns:r="http://schemas.openxmlformats.org/officeDocument/2006/relationships" xmlns:p="http://schemas.openxmlformats.org/presentationml/2006/main">
   <p:cSld>
     <p:spTree>
@@ -26867,7 +27038,7 @@
 </p:sld>
 </file>
 
-<file path=ppt/slides/slide66.xml><?xml version="1.0" encoding="utf-8"?>
+<file path=ppt\slides\slide66.xml><?xml version="1.0" encoding="utf-8"?>
 <p:sld xmlns:a="http://schemas.openxmlformats.org/drawingml/2006/main" xmlns:r="http://schemas.openxmlformats.org/officeDocument/2006/relationships" xmlns:p="http://schemas.openxmlformats.org/presentationml/2006/main">
   <p:cSld>
     <p:spTree>
@@ -27330,7 +27501,7 @@
 </p:sld>
 </file>
 
-<file path=ppt/slides/slide67.xml><?xml version="1.0" encoding="utf-8"?>
+<file path=ppt\slides\slide67.xml><?xml version="1.0" encoding="utf-8"?>
 <p:sld xmlns:a="http://schemas.openxmlformats.org/drawingml/2006/main" xmlns:r="http://schemas.openxmlformats.org/officeDocument/2006/relationships" xmlns:p="http://schemas.openxmlformats.org/presentationml/2006/main">
   <p:cSld>
     <p:spTree>
@@ -27842,7 +28013,7 @@
 </p:sld>
 </file>
 
-<file path=ppt/slides/slide68.xml><?xml version="1.0" encoding="utf-8"?>
+<file path=ppt\slides\slide68.xml><?xml version="1.0" encoding="utf-8"?>
 <p:sld xmlns:a="http://schemas.openxmlformats.org/drawingml/2006/main" xmlns:r="http://schemas.openxmlformats.org/officeDocument/2006/relationships" xmlns:p="http://schemas.openxmlformats.org/presentationml/2006/main">
   <p:cSld>
     <p:spTree>
@@ -28414,7 +28585,7 @@
 </p:sld>
 </file>
 
-<file path=ppt/slides/slide69.xml><?xml version="1.0" encoding="utf-8"?>
+<file path=ppt\slides\slide69.xml><?xml version="1.0" encoding="utf-8"?>
 <p:sld xmlns:a="http://schemas.openxmlformats.org/drawingml/2006/main" xmlns:r="http://schemas.openxmlformats.org/officeDocument/2006/relationships" xmlns:p="http://schemas.openxmlformats.org/presentationml/2006/main">
   <p:cSld>
     <p:spTree>
@@ -29127,7 +29298,7 @@
 </p:sld>
 </file>
 
-<file path=ppt/slides/slide7.xml><?xml version="1.0" encoding="utf-8"?>
+<file path=ppt\slides\slide7.xml><?xml version="1.0" encoding="utf-8"?>
 <p:sld xmlns:a="http://schemas.openxmlformats.org/drawingml/2006/main" xmlns:r="http://schemas.openxmlformats.org/officeDocument/2006/relationships" xmlns:p="http://schemas.openxmlformats.org/presentationml/2006/main">
   <p:cSld>
     <p:spTree>
@@ -29389,7 +29560,7 @@
 </p:sld>
 </file>
 
-<file path=ppt/slides/slide70.xml><?xml version="1.0" encoding="utf-8"?>
+<file path=ppt\slides\slide70.xml><?xml version="1.0" encoding="utf-8"?>
 <p:sld xmlns:a="http://schemas.openxmlformats.org/drawingml/2006/main" xmlns:r="http://schemas.openxmlformats.org/officeDocument/2006/relationships" xmlns:p="http://schemas.openxmlformats.org/presentationml/2006/main">
   <p:cSld>
     <p:spTree>
@@ -29711,7 +29882,7 @@
 </p:sld>
 </file>
 
-<file path=ppt/slides/slide71.xml><?xml version="1.0" encoding="utf-8"?>
+<file path=ppt\slides\slide71.xml><?xml version="1.0" encoding="utf-8"?>
 <p:sld xmlns:a="http://schemas.openxmlformats.org/drawingml/2006/main" xmlns:r="http://schemas.openxmlformats.org/officeDocument/2006/relationships" xmlns:p="http://schemas.openxmlformats.org/presentationml/2006/main">
   <p:cSld>
     <p:spTree>
@@ -30101,7 +30272,7 @@
 </p:sld>
 </file>
 
-<file path=ppt/slides/slide72.xml><?xml version="1.0" encoding="utf-8"?>
+<file path=ppt\slides\slide72.xml><?xml version="1.0" encoding="utf-8"?>
 <p:sld xmlns:a="http://schemas.openxmlformats.org/drawingml/2006/main" xmlns:r="http://schemas.openxmlformats.org/officeDocument/2006/relationships" xmlns:p="http://schemas.openxmlformats.org/presentationml/2006/main">
   <p:cSld>
     <p:spTree>
@@ -30256,7 +30427,7 @@
 </p:sld>
 </file>
 
-<file path=ppt/slides/slide73.xml><?xml version="1.0" encoding="utf-8"?>
+<file path=ppt\slides\slide73.xml><?xml version="1.0" encoding="utf-8"?>
 <p:sld xmlns:a="http://schemas.openxmlformats.org/drawingml/2006/main" xmlns:r="http://schemas.openxmlformats.org/officeDocument/2006/relationships" xmlns:p="http://schemas.openxmlformats.org/presentationml/2006/main">
   <p:cSld>
     <p:spTree>
@@ -30381,7 +30552,7 @@
 </p:sld>
 </file>
 
-<file path=ppt/slides/slide74.xml><?xml version="1.0" encoding="utf-8"?>
+<file path=ppt\slides\slide74.xml><?xml version="1.0" encoding="utf-8"?>
 <p:sld xmlns:a="http://schemas.openxmlformats.org/drawingml/2006/main" xmlns:r="http://schemas.openxmlformats.org/officeDocument/2006/relationships" xmlns:p="http://schemas.openxmlformats.org/presentationml/2006/main">
   <p:cSld>
     <p:spTree>
@@ -30929,7 +31100,7 @@
 </p:sld>
 </file>
 
-<file path=ppt/slides/slide75.xml><?xml version="1.0" encoding="utf-8"?>
+<file path=ppt\slides\slide75.xml><?xml version="1.0" encoding="utf-8"?>
 <p:sld xmlns:a="http://schemas.openxmlformats.org/drawingml/2006/main" xmlns:r="http://schemas.openxmlformats.org/officeDocument/2006/relationships" xmlns:p="http://schemas.openxmlformats.org/presentationml/2006/main">
   <p:cSld>
     <p:spTree>
@@ -31108,7 +31279,7 @@
 </p:sld>
 </file>
 
-<file path=ppt/slides/slide76.xml><?xml version="1.0" encoding="utf-8"?>
+<file path=ppt\slides\slide76.xml><?xml version="1.0" encoding="utf-8"?>
 <p:sld xmlns:a="http://schemas.openxmlformats.org/drawingml/2006/main" xmlns:r="http://schemas.openxmlformats.org/officeDocument/2006/relationships" xmlns:p="http://schemas.openxmlformats.org/presentationml/2006/main">
   <p:cSld>
     <p:spTree>
@@ -31509,7 +31680,7 @@
 </p:sld>
 </file>
 
-<file path=ppt/slides/slide77.xml><?xml version="1.0" encoding="utf-8"?>
+<file path=ppt\slides\slide77.xml><?xml version="1.0" encoding="utf-8"?>
 <p:sld xmlns:a="http://schemas.openxmlformats.org/drawingml/2006/main" xmlns:r="http://schemas.openxmlformats.org/officeDocument/2006/relationships" xmlns:p="http://schemas.openxmlformats.org/presentationml/2006/main">
   <p:cSld>
     <p:spTree>
@@ -31695,7 +31866,7 @@
 </p:sld>
 </file>
 
-<file path=ppt/slides/slide78.xml><?xml version="1.0" encoding="utf-8"?>
+<file path=ppt\slides\slide78.xml><?xml version="1.0" encoding="utf-8"?>
 <p:sld xmlns:a="http://schemas.openxmlformats.org/drawingml/2006/main" xmlns:r="http://schemas.openxmlformats.org/officeDocument/2006/relationships" xmlns:p="http://schemas.openxmlformats.org/presentationml/2006/main">
   <p:cSld>
     <p:spTree>
@@ -31885,7 +32056,7 @@
 </p:sld>
 </file>
 
-<file path=ppt/slides/slide79.xml><?xml version="1.0" encoding="utf-8"?>
+<file path=ppt\slides\slide79.xml><?xml version="1.0" encoding="utf-8"?>
 <p:sld xmlns:a="http://schemas.openxmlformats.org/drawingml/2006/main" xmlns:r="http://schemas.openxmlformats.org/officeDocument/2006/relationships" xmlns:p="http://schemas.openxmlformats.org/presentationml/2006/main">
   <p:cSld>
     <p:spTree>
@@ -32477,7 +32648,7 @@
 </p:sld>
 </file>
 
-<file path=ppt/slides/slide8.xml><?xml version="1.0" encoding="utf-8"?>
+<file path=ppt\slides\slide8.xml><?xml version="1.0" encoding="utf-8"?>
 <p:sld xmlns:a="http://schemas.openxmlformats.org/drawingml/2006/main" xmlns:r="http://schemas.openxmlformats.org/officeDocument/2006/relationships" xmlns:p="http://schemas.openxmlformats.org/presentationml/2006/main">
   <p:cSld>
     <p:spTree>
@@ -33419,7 +33590,7 @@
 </p:sld>
 </file>
 
-<file path=ppt/slides/slide80.xml><?xml version="1.0" encoding="utf-8"?>
+<file path=ppt\slides\slide80.xml><?xml version="1.0" encoding="utf-8"?>
 <p:sld xmlns:a="http://schemas.openxmlformats.org/drawingml/2006/main" xmlns:r="http://schemas.openxmlformats.org/officeDocument/2006/relationships" xmlns:p="http://schemas.openxmlformats.org/presentationml/2006/main">
   <p:cSld>
     <p:spTree>
@@ -33645,7 +33816,7 @@
 </p:sld>
 </file>
 
-<file path=ppt/slides/slide81.xml><?xml version="1.0" encoding="utf-8"?>
+<file path=ppt\slides\slide81.xml><?xml version="1.0" encoding="utf-8"?>
 <p:sld xmlns:a="http://schemas.openxmlformats.org/drawingml/2006/main" xmlns:r="http://schemas.openxmlformats.org/officeDocument/2006/relationships" xmlns:p="http://schemas.openxmlformats.org/presentationml/2006/main">
   <p:cSld>
     <p:spTree>
@@ -33863,7 +34034,7 @@
 </p:sld>
 </file>
 
-<file path=ppt/slides/slide82.xml><?xml version="1.0" encoding="utf-8"?>
+<file path=ppt\slides\slide82.xml><?xml version="1.0" encoding="utf-8"?>
 <p:sld xmlns:a="http://schemas.openxmlformats.org/drawingml/2006/main" xmlns:r="http://schemas.openxmlformats.org/officeDocument/2006/relationships" xmlns:p="http://schemas.openxmlformats.org/presentationml/2006/main">
   <p:cSld>
     <p:spTree>
@@ -34142,7 +34313,7 @@
 </p:sld>
 </file>
 
-<file path=ppt/slides/slide83.xml><?xml version="1.0" encoding="utf-8"?>
+<file path=ppt\slides\slide83.xml><?xml version="1.0" encoding="utf-8"?>
 <p:sld xmlns:a="http://schemas.openxmlformats.org/drawingml/2006/main" xmlns:r="http://schemas.openxmlformats.org/officeDocument/2006/relationships" xmlns:p="http://schemas.openxmlformats.org/presentationml/2006/main">
   <p:cSld>
     <p:spTree>
@@ -34355,7 +34526,7 @@
 </p:sld>
 </file>
 
-<file path=ppt/slides/slide84.xml><?xml version="1.0" encoding="utf-8"?>
+<file path=ppt\slides\slide84.xml><?xml version="1.0" encoding="utf-8"?>
 <p:sld xmlns:a="http://schemas.openxmlformats.org/drawingml/2006/main" xmlns:r="http://schemas.openxmlformats.org/officeDocument/2006/relationships" xmlns:p="http://schemas.openxmlformats.org/presentationml/2006/main">
   <p:cSld>
     <p:spTree>
@@ -34745,7 +34916,7 @@
 </p:sld>
 </file>
 
-<file path=ppt/slides/slide85.xml><?xml version="1.0" encoding="utf-8"?>
+<file path=ppt\slides\slide85.xml><?xml version="1.0" encoding="utf-8"?>
 <p:sld xmlns:a="http://schemas.openxmlformats.org/drawingml/2006/main" xmlns:r="http://schemas.openxmlformats.org/officeDocument/2006/relationships" xmlns:p="http://schemas.openxmlformats.org/presentationml/2006/main">
   <p:cSld>
     <p:spTree>
@@ -35363,7 +35534,7 @@
 </p:sld>
 </file>
 
-<file path=ppt/slides/slide86.xml><?xml version="1.0" encoding="utf-8"?>
+<file path=ppt\slides\slide86.xml><?xml version="1.0" encoding="utf-8"?>
 <p:sld xmlns:a="http://schemas.openxmlformats.org/drawingml/2006/main" xmlns:r="http://schemas.openxmlformats.org/officeDocument/2006/relationships" xmlns:p="http://schemas.openxmlformats.org/presentationml/2006/main">
   <p:cSld>
     <p:spTree>
@@ -35612,7 +35783,7 @@
 </p:sld>
 </file>
 
-<file path=ppt/slides/slide87.xml><?xml version="1.0" encoding="utf-8"?>
+<file path=ppt\slides\slide87.xml><?xml version="1.0" encoding="utf-8"?>
 <p:sld xmlns:a="http://schemas.openxmlformats.org/drawingml/2006/main" xmlns:r="http://schemas.openxmlformats.org/officeDocument/2006/relationships" xmlns:p="http://schemas.openxmlformats.org/presentationml/2006/main">
   <p:cSld>
     <p:spTree>
@@ -35969,7 +36140,7 @@
 </p:sld>
 </file>
 
-<file path=ppt/slides/slide88.xml><?xml version="1.0" encoding="utf-8"?>
+<file path=ppt\slides\slide88.xml><?xml version="1.0" encoding="utf-8"?>
 <p:sld xmlns:a="http://schemas.openxmlformats.org/drawingml/2006/main" xmlns:r="http://schemas.openxmlformats.org/officeDocument/2006/relationships" xmlns:p="http://schemas.openxmlformats.org/presentationml/2006/main">
   <p:cSld>
     <p:spTree>
@@ -36561,7 +36732,7 @@
 </p:sld>
 </file>
 
-<file path=ppt/slides/slide9.xml><?xml version="1.0" encoding="utf-8"?>
+<file path=ppt\slides\slide9.xml><?xml version="1.0" encoding="utf-8"?>
 <p:sld xmlns:a="http://schemas.openxmlformats.org/drawingml/2006/main" xmlns:r="http://schemas.openxmlformats.org/officeDocument/2006/relationships" xmlns:p="http://schemas.openxmlformats.org/presentationml/2006/main">
   <p:cSld>
     <p:spTree>
@@ -37226,7 +37397,189 @@
 </p:sld>
 </file>
 
-<file path=ppt/theme/theme1.xml><?xml version="1.0" encoding="utf-8"?>
+<file path=ppt\tableStyles.xml><?xml version="1.0" encoding="utf-8"?>
+<a:tblStyleLst xmlns:a="http://schemas.openxmlformats.org/drawingml/2006/main" def="{5C22544A-7EE6-4342-B048-85BDC9FD1C3A}">
+  <a:tblStyle styleId="{5C22544A-7EE6-4342-B048-85BDC9FD1C3A}" styleName="Medium Style 2 - Accent 1">
+    <a:wholeTbl>
+      <a:tcTxStyle>
+        <a:fontRef idx="minor">
+          <a:prstClr val="black"/>
+        </a:fontRef>
+        <a:schemeClr val="dk1"/>
+      </a:tcTxStyle>
+      <a:tcStyle>
+        <a:tcBdr>
+          <a:left>
+            <a:ln w="12700" cmpd="sng">
+              <a:solidFill>
+                <a:schemeClr val="lt1"/>
+              </a:solidFill>
+            </a:ln>
+          </a:left>
+          <a:right>
+            <a:ln w="12700" cmpd="sng">
+              <a:solidFill>
+                <a:schemeClr val="lt1"/>
+              </a:solidFill>
+            </a:ln>
+          </a:right>
+          <a:top>
+            <a:ln w="12700" cmpd="sng">
+              <a:solidFill>
+                <a:schemeClr val="lt1"/>
+              </a:solidFill>
+            </a:ln>
+          </a:top>
+          <a:bottom>
+            <a:ln w="12700" cmpd="sng">
+              <a:solidFill>
+                <a:schemeClr val="lt1"/>
+              </a:solidFill>
+            </a:ln>
+          </a:bottom>
+          <a:insideH>
+            <a:ln w="12700" cmpd="sng">
+              <a:solidFill>
+                <a:schemeClr val="lt1"/>
+              </a:solidFill>
+            </a:ln>
+          </a:insideH>
+          <a:insideV>
+            <a:ln w="12700" cmpd="sng">
+              <a:solidFill>
+                <a:schemeClr val="lt1"/>
+              </a:solidFill>
+            </a:ln>
+          </a:insideV>
+        </a:tcBdr>
+        <a:fill>
+          <a:solidFill>
+            <a:schemeClr val="accent1">
+              <a:tint val="20000"/>
+            </a:schemeClr>
+          </a:solidFill>
+        </a:fill>
+      </a:tcStyle>
+    </a:wholeTbl>
+    <a:band1H>
+      <a:tcStyle>
+        <a:tcBdr/>
+        <a:fill>
+          <a:solidFill>
+            <a:schemeClr val="accent1">
+              <a:tint val="40000"/>
+            </a:schemeClr>
+          </a:solidFill>
+        </a:fill>
+      </a:tcStyle>
+    </a:band1H>
+    <a:band2H>
+      <a:tcStyle>
+        <a:tcBdr/>
+      </a:tcStyle>
+    </a:band2H>
+    <a:band1V>
+      <a:tcStyle>
+        <a:tcBdr/>
+        <a:fill>
+          <a:solidFill>
+            <a:schemeClr val="accent1">
+              <a:tint val="40000"/>
+            </a:schemeClr>
+          </a:solidFill>
+        </a:fill>
+      </a:tcStyle>
+    </a:band1V>
+    <a:band2V>
+      <a:tcStyle>
+        <a:tcBdr/>
+      </a:tcStyle>
+    </a:band2V>
+    <a:lastCol>
+      <a:tcTxStyle b="on">
+        <a:fontRef idx="minor">
+          <a:prstClr val="black"/>
+        </a:fontRef>
+        <a:schemeClr val="lt1"/>
+      </a:tcTxStyle>
+      <a:tcStyle>
+        <a:tcBdr/>
+        <a:fill>
+          <a:solidFill>
+            <a:schemeClr val="accent1"/>
+          </a:solidFill>
+        </a:fill>
+      </a:tcStyle>
+    </a:lastCol>
+    <a:firstCol>
+      <a:tcTxStyle b="on">
+        <a:fontRef idx="minor">
+          <a:prstClr val="black"/>
+        </a:fontRef>
+        <a:schemeClr val="lt1"/>
+      </a:tcTxStyle>
+      <a:tcStyle>
+        <a:tcBdr/>
+        <a:fill>
+          <a:solidFill>
+            <a:schemeClr val="accent1"/>
+          </a:solidFill>
+        </a:fill>
+      </a:tcStyle>
+    </a:firstCol>
+    <a:lastRow>
+      <a:tcTxStyle b="on">
+        <a:fontRef idx="minor">
+          <a:prstClr val="black"/>
+        </a:fontRef>
+        <a:schemeClr val="lt1"/>
+      </a:tcTxStyle>
+      <a:tcStyle>
+        <a:tcBdr>
+          <a:top>
+            <a:ln w="38100" cmpd="sng">
+              <a:solidFill>
+                <a:schemeClr val="lt1"/>
+              </a:solidFill>
+            </a:ln>
+          </a:top>
+        </a:tcBdr>
+        <a:fill>
+          <a:solidFill>
+            <a:schemeClr val="accent1"/>
+          </a:solidFill>
+        </a:fill>
+      </a:tcStyle>
+    </a:lastRow>
+    <a:firstRow>
+      <a:tcTxStyle b="on">
+        <a:fontRef idx="minor">
+          <a:prstClr val="black"/>
+        </a:fontRef>
+        <a:schemeClr val="lt1"/>
+      </a:tcTxStyle>
+      <a:tcStyle>
+        <a:tcBdr>
+          <a:bottom>
+            <a:ln w="38100" cmpd="sng">
+              <a:solidFill>
+                <a:schemeClr val="lt1"/>
+              </a:solidFill>
+            </a:ln>
+          </a:bottom>
+        </a:tcBdr>
+        <a:fill>
+          <a:solidFill>
+            <a:schemeClr val="accent1"/>
+          </a:solidFill>
+        </a:fill>
+      </a:tcStyle>
+    </a:firstRow>
+  </a:tblStyle>
+</a:tblStyleLst>
+</file>
+
+<file path=ppt\theme\theme1.xml><?xml version="1.0" encoding="utf-8"?>
 <a:theme xmlns:a="http://schemas.openxmlformats.org/drawingml/2006/main" name="1_Office Theme">
   <a:themeElements>
     <a:clrScheme name="Office">
@@ -37511,7 +37864,7 @@
 </a:theme>
 </file>
 
-<file path=ppt/theme/theme2.xml><?xml version="1.0" encoding="utf-8"?>
+<file path=ppt\theme\theme2.xml><?xml version="1.0" encoding="utf-8"?>
 <a:theme xmlns:a="http://schemas.openxmlformats.org/drawingml/2006/main" name="Office Theme">
   <a:themeElements>
     <a:clrScheme name="Office">
@@ -37794,4 +38147,62 @@
   <a:objectDefaults/>
   <a:extraClrSchemeLst/>
 </a:theme>
+</file>
+
+<file path=ppt\viewProps.xml><?xml version="1.0" encoding="utf-8"?>
+<p:viewPr xmlns:a="http://schemas.openxmlformats.org/drawingml/2006/main" xmlns:r="http://schemas.openxmlformats.org/officeDocument/2006/relationships" xmlns:p="http://schemas.openxmlformats.org/presentationml/2006/main">
+  <p:normalViewPr>
+    <p:restoredLeft sz="15620"/>
+    <p:restoredTop sz="94660"/>
+  </p:normalViewPr>
+  <p:slideViewPr>
+    <p:cSldViewPr>
+      <p:cViewPr varScale="1">
+        <p:scale>
+          <a:sx n="97" d="100"/>
+          <a:sy n="97" d="100"/>
+        </p:scale>
+        <p:origin x="1218" y="96"/>
+      </p:cViewPr>
+      <p:guideLst>
+        <p:guide orient="horz" pos="2160"/>
+        <p:guide pos="2880"/>
+      </p:guideLst>
+    </p:cSldViewPr>
+  </p:slideViewPr>
+  <p:notesTextViewPr>
+    <p:cViewPr>
+      <p:scale>
+        <a:sx n="1" d="1"/>
+        <a:sy n="1" d="1"/>
+      </p:scale>
+      <p:origin x="0" y="0"/>
+    </p:cViewPr>
+  </p:notesTextViewPr>
+  <p:sorterViewPr>
+    <p:cViewPr>
+      <p:scale>
+        <a:sx n="100" d="100"/>
+        <a:sy n="100" d="100"/>
+      </p:scale>
+      <p:origin x="0" y="-7626"/>
+    </p:cViewPr>
+  </p:sorterViewPr>
+  <p:notesViewPr>
+    <p:cSldViewPr>
+      <p:cViewPr varScale="1">
+        <p:scale>
+          <a:sx n="87" d="100"/>
+          <a:sy n="87" d="100"/>
+        </p:scale>
+        <p:origin x="-2040" y="-72"/>
+      </p:cViewPr>
+      <p:guideLst>
+        <p:guide orient="horz" pos="2880"/>
+        <p:guide pos="2160"/>
+      </p:guideLst>
+    </p:cSldViewPr>
+  </p:notesViewPr>
+  <p:gridSpacing cx="76200" cy="76200"/>
+</p:viewPr>
 </file>
--- a/lectures/09-CountData.pptx
+++ b/lectures/09-CountData.pptx
@@ -224,6 +224,10 @@
             <p14:sldId id="262"/>
             <p14:sldId id="263"/>
             <p14:sldId id="264"/>
+          </p14:sldIdLst>
+        </p14:section>
+        <p14:section name="MLE" id="{E3B867BB-74F5-4BFC-880B-699563190DDA}">
+          <p14:sldIdLst>
             <p14:sldId id="265"/>
             <p14:sldId id="335"/>
             <p14:sldId id="336"/>
@@ -445,7 +449,7 @@
           <a:p>
             <a:fld id="{08BD4FA9-F3CE-45B3-A980-C331C6F1EF65}" type="datetimeFigureOut">
               <a:rPr lang="en-US" smtClean="0"/>
-              <a:t>3/10/2026</a:t>
+              <a:t>3/12/2026</a:t>
             </a:fld>
             <a:endParaRPr lang="en-US"/>
           </a:p>
@@ -718,7 +722,7 @@
           <a:p>
             <a:fld id="{EAAD3657-2200-4D14-82C0-10C39B0F0F06}" type="datetime1">
               <a:rPr lang="en-US" smtClean="0"/>
-              <a:t>3/10/2026</a:t>
+              <a:t>3/12/2026</a:t>
             </a:fld>
             <a:endParaRPr lang="en-US"/>
           </a:p>
@@ -886,7 +890,7 @@
           <a:p>
             <a:fld id="{11BBAF55-A85E-4993-914E-FC1E5AA7DF24}" type="datetime1">
               <a:rPr lang="en-US" smtClean="0"/>
-              <a:t>3/10/2026</a:t>
+              <a:t>3/12/2026</a:t>
             </a:fld>
             <a:endParaRPr lang="en-US"/>
           </a:p>
@@ -1064,7 +1068,7 @@
           <a:p>
             <a:fld id="{39816E07-E1DB-44A4-A5E5-9F4B54E8C933}" type="datetime1">
               <a:rPr lang="en-US" smtClean="0"/>
-              <a:t>3/10/2026</a:t>
+              <a:t>3/12/2026</a:t>
             </a:fld>
             <a:endParaRPr lang="en-US"/>
           </a:p>
@@ -1249,7 +1253,7 @@
           <a:p>
             <a:fld id="{C2B1AD17-B813-4477-8AFE-B1860CC59113}" type="datetime1">
               <a:rPr lang="en-US" smtClean="0"/>
-              <a:t>3/10/2026</a:t>
+              <a:t>3/12/2026</a:t>
             </a:fld>
             <a:endParaRPr lang="en-US"/>
           </a:p>
@@ -1494,7 +1498,7 @@
           <a:p>
             <a:fld id="{D0975C0D-5C9E-48CC-8D31-F42D19FA8F7A}" type="datetime1">
               <a:rPr lang="en-US" smtClean="0"/>
-              <a:t>3/10/2026</a:t>
+              <a:t>3/12/2026</a:t>
             </a:fld>
             <a:endParaRPr lang="en-US"/>
           </a:p>
@@ -1779,7 +1783,7 @@
           <a:p>
             <a:fld id="{28657551-0F2B-4F09-86FD-F7994CE83DC5}" type="datetime1">
               <a:rPr lang="en-US" smtClean="0"/>
-              <a:t>3/10/2026</a:t>
+              <a:t>3/12/2026</a:t>
             </a:fld>
             <a:endParaRPr lang="en-US"/>
           </a:p>
@@ -2198,7 +2202,7 @@
           <a:p>
             <a:fld id="{3929D2B2-4200-46B9-96C3-02A55D5FAA00}" type="datetime1">
               <a:rPr lang="en-US" smtClean="0"/>
-              <a:t>3/10/2026</a:t>
+              <a:t>3/12/2026</a:t>
             </a:fld>
             <a:endParaRPr lang="en-US"/>
           </a:p>
@@ -2315,7 +2319,7 @@
           <a:p>
             <a:fld id="{41FF7722-74E8-497F-A072-89677A2C2373}" type="datetime1">
               <a:rPr lang="en-US" smtClean="0"/>
-              <a:t>3/10/2026</a:t>
+              <a:t>3/12/2026</a:t>
             </a:fld>
             <a:endParaRPr lang="en-US"/>
           </a:p>
@@ -2410,7 +2414,7 @@
           <a:p>
             <a:fld id="{BD26212E-B46B-426F-AE59-AA326827D9E0}" type="datetime1">
               <a:rPr lang="en-US" smtClean="0"/>
-              <a:t>3/10/2026</a:t>
+              <a:t>3/12/2026</a:t>
             </a:fld>
             <a:endParaRPr lang="en-US"/>
           </a:p>
@@ -2685,7 +2689,7 @@
           <a:p>
             <a:fld id="{FB9B81E8-09EA-4684-A39F-38DE1E49D20C}" type="datetime1">
               <a:rPr lang="en-US" smtClean="0"/>
-              <a:t>3/10/2026</a:t>
+              <a:t>3/12/2026</a:t>
             </a:fld>
             <a:endParaRPr lang="en-US"/>
           </a:p>
@@ -2937,7 +2941,7 @@
           <a:p>
             <a:fld id="{35C5CC5F-056C-4047-9A5C-9F5B4BED129B}" type="datetime1">
               <a:rPr lang="en-US" smtClean="0"/>
-              <a:t>3/10/2026</a:t>
+              <a:t>3/12/2026</a:t>
             </a:fld>
             <a:endParaRPr lang="en-US"/>
           </a:p>
@@ -3151,7 +3155,7 @@
           <a:p>
             <a:fld id="{E8171053-07BD-4A17-AC24-0A22EAA36098}" type="datetime1">
               <a:rPr lang="en-US" smtClean="0"/>
-              <a:t>3/10/2026</a:t>
+              <a:t>3/12/2026</a:t>
             </a:fld>
             <a:endParaRPr lang="en-US"/>
           </a:p>
@@ -7650,6 +7654,18 @@
   <p:clrMapOvr>
     <a:masterClrMapping/>
   </p:clrMapOvr>
+  <mc:AlternateContent xmlns:mc="http://schemas.openxmlformats.org/markup-compatibility/2006">
+    <mc:Choice xmlns:p14="http://schemas.microsoft.com/office/powerpoint/2010/main" Requires="p14">
+      <p:transition spd="slow" p14:dur="2000">
+        <p14:prism isContent="1"/>
+      </p:transition>
+    </mc:Choice>
+    <mc:Fallback>
+      <p:transition spd="slow">
+        <p:fade/>
+      </p:transition>
+    </mc:Fallback>
+  </mc:AlternateContent>
 </p:sld>
 </file>
 
@@ -8071,6 +8087,18 @@
   <p:clrMapOvr>
     <a:masterClrMapping/>
   </p:clrMapOvr>
+  <mc:AlternateContent xmlns:mc="http://schemas.openxmlformats.org/markup-compatibility/2006">
+    <mc:Choice xmlns:p14="http://schemas.microsoft.com/office/powerpoint/2010/main" Requires="p14">
+      <p:transition spd="slow" p14:dur="2000">
+        <p14:prism isContent="1"/>
+      </p:transition>
+    </mc:Choice>
+    <mc:Fallback>
+      <p:transition spd="slow">
+        <p:fade/>
+      </p:transition>
+    </mc:Fallback>
+  </mc:AlternateContent>
 </p:sld>
 </file>
 
@@ -8190,6 +8218,18 @@
   <p:clrMapOvr>
     <a:masterClrMapping/>
   </p:clrMapOvr>
+  <mc:AlternateContent xmlns:mc="http://schemas.openxmlformats.org/markup-compatibility/2006">
+    <mc:Choice xmlns:p14="http://schemas.microsoft.com/office/powerpoint/2010/main" Requires="p14">
+      <p:transition spd="slow" p14:dur="2000">
+        <p14:prism isContent="1"/>
+      </p:transition>
+    </mc:Choice>
+    <mc:Fallback>
+      <p:transition spd="slow">
+        <p:fade/>
+      </p:transition>
+    </mc:Fallback>
+  </mc:AlternateContent>
 </p:sld>
 </file>
 
@@ -8339,6 +8379,18 @@
   <p:clrMapOvr>
     <a:masterClrMapping/>
   </p:clrMapOvr>
+  <mc:AlternateContent xmlns:mc="http://schemas.openxmlformats.org/markup-compatibility/2006">
+    <mc:Choice xmlns:p14="http://schemas.microsoft.com/office/powerpoint/2010/main" Requires="p14">
+      <p:transition spd="slow" p14:dur="2000">
+        <p14:prism isContent="1"/>
+      </p:transition>
+    </mc:Choice>
+    <mc:Fallback>
+      <p:transition spd="slow">
+        <p:fade/>
+      </p:transition>
+    </mc:Fallback>
+  </mc:AlternateContent>
 </p:sld>
 </file>
 
@@ -9250,6 +9302,18 @@
   <p:clrMapOvr>
     <a:masterClrMapping/>
   </p:clrMapOvr>
+  <mc:AlternateContent xmlns:mc="http://schemas.openxmlformats.org/markup-compatibility/2006">
+    <mc:Choice xmlns:p14="http://schemas.microsoft.com/office/powerpoint/2010/main" Requires="p14">
+      <p:transition spd="slow" p14:dur="2000">
+        <p14:prism isContent="1"/>
+      </p:transition>
+    </mc:Choice>
+    <mc:Fallback>
+      <p:transition spd="slow">
+        <p:fade/>
+      </p:transition>
+    </mc:Fallback>
+  </mc:AlternateContent>
   <p:timing>
     <p:tnLst>
       <p:par>
@@ -10750,6 +10814,51 @@
           </a:p>
         </p:txBody>
       </p:sp>
+      <p:sp>
+        <p:nvSpPr>
+          <p:cNvPr id="7" name="TextBox 6">
+            <a:extLst>
+              <a:ext uri="{FF2B5EF4-FFF2-40B4-BE49-F238E27FC236}">
+                <a16:creationId xmlns:a16="http://schemas.microsoft.com/office/drawing/2014/main" id="{9FBE61B1-8501-6918-2871-225B0D3B9C16}"/>
+              </a:ext>
+            </a:extLst>
+          </p:cNvPr>
+          <p:cNvSpPr txBox="1"/>
+          <p:nvPr/>
+        </p:nvSpPr>
+        <p:spPr>
+          <a:xfrm>
+            <a:off x="609600" y="5943600"/>
+            <a:ext cx="8001000" cy="338554"/>
+          </a:xfrm>
+          <a:prstGeom prst="rect">
+            <a:avLst/>
+          </a:prstGeom>
+          <a:noFill/>
+        </p:spPr>
+        <p:txBody>
+          <a:bodyPr wrap="square" rtlCol="0">
+            <a:spAutoFit/>
+          </a:bodyPr>
+          <a:lstStyle/>
+          <a:p>
+            <a:r>
+              <a:rPr lang="en-CA" sz="1600" dirty="0"/>
+              <a:t>R code for this example: </a:t>
+            </a:r>
+            <a:r>
+              <a:rPr lang="en-CA" sz="1600" dirty="0">
+                <a:hlinkClick r:id="rId2"/>
+              </a:rPr>
+              <a:t>https://friendly.github.io/psy6136/R/phdpubs.R</a:t>
+            </a:r>
+            <a:r>
+              <a:rPr lang="en-CA" sz="1600" dirty="0"/>
+              <a:t> </a:t>
+            </a:r>
+          </a:p>
+        </p:txBody>
+      </p:sp>
     </p:spTree>
     <p:extLst>
       <p:ext uri="{BB962C8B-B14F-4D97-AF65-F5344CB8AC3E}">
@@ -11839,6 +11948,18 @@
   <p:clrMapOvr>
     <a:masterClrMapping/>
   </p:clrMapOvr>
+  <mc:AlternateContent xmlns:mc="http://schemas.openxmlformats.org/markup-compatibility/2006">
+    <mc:Choice xmlns:p14="http://schemas.microsoft.com/office/powerpoint/2010/main" Requires="p14">
+      <p:transition spd="slow" p14:dur="2000">
+        <p14:prism isContent="1"/>
+      </p:transition>
+    </mc:Choice>
+    <mc:Fallback>
+      <p:transition spd="slow">
+        <p:fade/>
+      </p:transition>
+    </mc:Fallback>
+  </mc:AlternateContent>
 </p:sld>
 </file>
 
@@ -12079,13 +12200,13 @@
   <p:clrMapOvr>
     <a:masterClrMapping/>
   </p:clrMapOvr>
-  <mc:AlternateContent xmlns:mc="http://schemas.openxmlformats.org/markup-compatibility/2006" xmlns:p14="http://schemas.microsoft.com/office/powerpoint/2010/main">
-    <mc:Choice Requires="p14">
+  <mc:AlternateContent xmlns:mc="http://schemas.openxmlformats.org/markup-compatibility/2006">
+    <mc:Choice xmlns:p14="http://schemas.microsoft.com/office/powerpoint/2010/main" Requires="p14">
       <p:transition spd="slow" p14:dur="2000">
         <p14:prism isContent="1"/>
       </p:transition>
     </mc:Choice>
-    <mc:Fallback xmlns="">
+    <mc:Fallback>
       <p:transition spd="slow">
         <p:fade/>
       </p:transition>
@@ -14051,6 +14172,18 @@
   <p:clrMapOvr>
     <a:masterClrMapping/>
   </p:clrMapOvr>
+  <mc:AlternateContent xmlns:mc="http://schemas.openxmlformats.org/markup-compatibility/2006">
+    <mc:Choice xmlns:p14="http://schemas.microsoft.com/office/powerpoint/2010/main" Requires="p14">
+      <p:transition spd="slow" p14:dur="2000">
+        <p14:prism isContent="1"/>
+      </p:transition>
+    </mc:Choice>
+    <mc:Fallback>
+      <p:transition spd="slow">
+        <p:fade/>
+      </p:transition>
+    </mc:Fallback>
+  </mc:AlternateContent>
   <p:timing>
     <p:tnLst>
       <p:par>
@@ -14759,6 +14892,18 @@
   <p:clrMapOvr>
     <a:masterClrMapping/>
   </p:clrMapOvr>
+  <mc:AlternateContent xmlns:mc="http://schemas.openxmlformats.org/markup-compatibility/2006">
+    <mc:Choice xmlns:p14="http://schemas.microsoft.com/office/powerpoint/2010/main" Requires="p14">
+      <p:transition spd="slow" p14:dur="2000">
+        <p14:prism isContent="1"/>
+      </p:transition>
+    </mc:Choice>
+    <mc:Fallback>
+      <p:transition spd="slow">
+        <p:fade/>
+      </p:transition>
+    </mc:Fallback>
+  </mc:AlternateContent>
 </p:sld>
 </file>
 
@@ -15222,6 +15367,18 @@
   <p:clrMapOvr>
     <a:masterClrMapping/>
   </p:clrMapOvr>
+  <mc:AlternateContent xmlns:mc="http://schemas.openxmlformats.org/markup-compatibility/2006">
+    <mc:Choice xmlns:p14="http://schemas.microsoft.com/office/powerpoint/2010/main" Requires="p14">
+      <p:transition spd="slow" p14:dur="2000">
+        <p14:prism isContent="1"/>
+      </p:transition>
+    </mc:Choice>
+    <mc:Fallback>
+      <p:transition spd="slow">
+        <p:fade/>
+      </p:transition>
+    </mc:Fallback>
+  </mc:AlternateContent>
 </p:sld>
 </file>
 
@@ -15440,6 +15597,18 @@
   <p:clrMapOvr>
     <a:masterClrMapping/>
   </p:clrMapOvr>
+  <mc:AlternateContent xmlns:mc="http://schemas.openxmlformats.org/markup-compatibility/2006">
+    <mc:Choice xmlns:p14="http://schemas.microsoft.com/office/powerpoint/2010/main" Requires="p14">
+      <p:transition spd="slow" p14:dur="2000">
+        <p14:prism isContent="1"/>
+      </p:transition>
+    </mc:Choice>
+    <mc:Fallback>
+      <p:transition spd="slow">
+        <p:fade/>
+      </p:transition>
+    </mc:Fallback>
+  </mc:AlternateContent>
 </p:sld>
 </file>
 
@@ -15838,6 +16007,18 @@
   <p:clrMapOvr>
     <a:masterClrMapping/>
   </p:clrMapOvr>
+  <mc:AlternateContent xmlns:mc="http://schemas.openxmlformats.org/markup-compatibility/2006">
+    <mc:Choice xmlns:p14="http://schemas.microsoft.com/office/powerpoint/2010/main" Requires="p14">
+      <p:transition spd="slow" p14:dur="2000">
+        <p14:prism isContent="1"/>
+      </p:transition>
+    </mc:Choice>
+    <mc:Fallback>
+      <p:transition spd="slow">
+        <p:fade/>
+      </p:transition>
+    </mc:Fallback>
+  </mc:AlternateContent>
 </p:sld>
 </file>
 
@@ -16143,6 +16324,18 @@
   <p:clrMapOvr>
     <a:masterClrMapping/>
   </p:clrMapOvr>
+  <mc:AlternateContent xmlns:mc="http://schemas.openxmlformats.org/markup-compatibility/2006">
+    <mc:Choice xmlns:p14="http://schemas.microsoft.com/office/powerpoint/2010/main" Requires="p14">
+      <p:transition spd="slow" p14:dur="2000">
+        <p14:prism isContent="1"/>
+      </p:transition>
+    </mc:Choice>
+    <mc:Fallback>
+      <p:transition spd="slow">
+        <p:fade/>
+      </p:transition>
+    </mc:Fallback>
+  </mc:AlternateContent>
 </p:sld>
 </file>
 
@@ -16353,6 +16546,18 @@
   <p:clrMapOvr>
     <a:masterClrMapping/>
   </p:clrMapOvr>
+  <mc:AlternateContent xmlns:mc="http://schemas.openxmlformats.org/markup-compatibility/2006">
+    <mc:Choice xmlns:p14="http://schemas.microsoft.com/office/powerpoint/2010/main" Requires="p14">
+      <p:transition spd="slow" p14:dur="2000">
+        <p14:prism isContent="1"/>
+      </p:transition>
+    </mc:Choice>
+    <mc:Fallback>
+      <p:transition spd="slow">
+        <p:fade/>
+      </p:transition>
+    </mc:Fallback>
+  </mc:AlternateContent>
 </p:sld>
 </file>
 
@@ -16543,6 +16748,18 @@
   <p:clrMapOvr>
     <a:masterClrMapping/>
   </p:clrMapOvr>
+  <mc:AlternateContent xmlns:mc="http://schemas.openxmlformats.org/markup-compatibility/2006">
+    <mc:Choice xmlns:p14="http://schemas.microsoft.com/office/powerpoint/2010/main" Requires="p14">
+      <p:transition spd="slow" p14:dur="2000">
+        <p14:prism isContent="1"/>
+      </p:transition>
+    </mc:Choice>
+    <mc:Fallback>
+      <p:transition spd="slow">
+        <p:fade/>
+      </p:transition>
+    </mc:Fallback>
+  </mc:AlternateContent>
 </p:sld>
 </file>
 
@@ -16814,6 +17031,18 @@
   <p:clrMapOvr>
     <a:masterClrMapping/>
   </p:clrMapOvr>
+  <mc:AlternateContent xmlns:mc="http://schemas.openxmlformats.org/markup-compatibility/2006">
+    <mc:Choice xmlns:p14="http://schemas.microsoft.com/office/powerpoint/2010/main" Requires="p14">
+      <p:transition spd="slow" p14:dur="2000">
+        <p14:prism isContent="1"/>
+      </p:transition>
+    </mc:Choice>
+    <mc:Fallback>
+      <p:transition spd="slow">
+        <p:fade/>
+      </p:transition>
+    </mc:Fallback>
+  </mc:AlternateContent>
 </p:sld>
 </file>
 
@@ -17327,6 +17556,18 @@
   <p:clrMapOvr>
     <a:masterClrMapping/>
   </p:clrMapOvr>
+  <mc:AlternateContent xmlns:mc="http://schemas.openxmlformats.org/markup-compatibility/2006">
+    <mc:Choice xmlns:p14="http://schemas.microsoft.com/office/powerpoint/2010/main" Requires="p14">
+      <p:transition spd="slow" p14:dur="2000">
+        <p14:prism isContent="1"/>
+      </p:transition>
+    </mc:Choice>
+    <mc:Fallback>
+      <p:transition spd="slow">
+        <p:fade/>
+      </p:transition>
+    </mc:Fallback>
+  </mc:AlternateContent>
   <p:timing>
     <p:tnLst>
       <p:par>
@@ -18000,78 +18241,76 @@
             <a:gdLst>
               <a:gd name="csX0" fmla="*/ 0 w 8124314"/>
               <a:gd name="csY0" fmla="*/ 0 h 1200329"/>
-              <a:gd name="csX1" fmla="*/ 499065 w 8124314"/>
+              <a:gd name="csX1" fmla="*/ 742794 w 8124314"/>
               <a:gd name="csY1" fmla="*/ 0 h 1200329"/>
-              <a:gd name="csX2" fmla="*/ 835644 w 8124314"/>
+              <a:gd name="csX2" fmla="*/ 1160616 w 8124314"/>
               <a:gd name="csY2" fmla="*/ 0 h 1200329"/>
-              <a:gd name="csX3" fmla="*/ 1578438 w 8124314"/>
+              <a:gd name="csX3" fmla="*/ 1740924 w 8124314"/>
               <a:gd name="csY3" fmla="*/ 0 h 1200329"/>
-              <a:gd name="csX4" fmla="*/ 2077503 w 8124314"/>
+              <a:gd name="csX4" fmla="*/ 2402476 w 8124314"/>
               <a:gd name="csY4" fmla="*/ 0 h 1200329"/>
-              <a:gd name="csX5" fmla="*/ 2576568 w 8124314"/>
+              <a:gd name="csX5" fmla="*/ 2739054 w 8124314"/>
               <a:gd name="csY5" fmla="*/ 0 h 1200329"/>
-              <a:gd name="csX6" fmla="*/ 3319363 w 8124314"/>
+              <a:gd name="csX6" fmla="*/ 3075633 w 8124314"/>
               <a:gd name="csY6" fmla="*/ 0 h 1200329"/>
-              <a:gd name="csX7" fmla="*/ 3737184 w 8124314"/>
+              <a:gd name="csX7" fmla="*/ 3818428 w 8124314"/>
               <a:gd name="csY7" fmla="*/ 0 h 1200329"/>
-              <a:gd name="csX8" fmla="*/ 4479979 w 8124314"/>
+              <a:gd name="csX8" fmla="*/ 4398736 w 8124314"/>
               <a:gd name="csY8" fmla="*/ 0 h 1200329"/>
-              <a:gd name="csX9" fmla="*/ 5222773 w 8124314"/>
+              <a:gd name="csX9" fmla="*/ 4735314 w 8124314"/>
               <a:gd name="csY9" fmla="*/ 0 h 1200329"/>
-              <a:gd name="csX10" fmla="*/ 5803081 w 8124314"/>
+              <a:gd name="csX10" fmla="*/ 5315623 w 8124314"/>
               <a:gd name="csY10" fmla="*/ 0 h 1200329"/>
-              <a:gd name="csX11" fmla="*/ 6545876 w 8124314"/>
+              <a:gd name="csX11" fmla="*/ 6058417 w 8124314"/>
               <a:gd name="csY11" fmla="*/ 0 h 1200329"/>
-              <a:gd name="csX12" fmla="*/ 7044941 w 8124314"/>
+              <a:gd name="csX12" fmla="*/ 6557482 w 8124314"/>
               <a:gd name="csY12" fmla="*/ 0 h 1200329"/>
-              <a:gd name="csX13" fmla="*/ 7544006 w 8124314"/>
+              <a:gd name="csX13" fmla="*/ 7056547 w 8124314"/>
               <a:gd name="csY13" fmla="*/ 0 h 1200329"/>
               <a:gd name="csX14" fmla="*/ 8124314 w 8124314"/>
               <a:gd name="csY14" fmla="*/ 0 h 1200329"/>
               <a:gd name="csX15" fmla="*/ 8124314 w 8124314"/>
-              <a:gd name="csY15" fmla="*/ 388106 h 1200329"/>
+              <a:gd name="csY15" fmla="*/ 412113 h 1200329"/>
               <a:gd name="csX16" fmla="*/ 8124314 w 8124314"/>
-              <a:gd name="csY16" fmla="*/ 788216 h 1200329"/>
+              <a:gd name="csY16" fmla="*/ 812223 h 1200329"/>
               <a:gd name="csX17" fmla="*/ 8124314 w 8124314"/>
               <a:gd name="csY17" fmla="*/ 1200329 h 1200329"/>
-              <a:gd name="csX18" fmla="*/ 7462763 w 8124314"/>
+              <a:gd name="csX18" fmla="*/ 7625249 w 8124314"/>
               <a:gd name="csY18" fmla="*/ 1200329 h 1200329"/>
-              <a:gd name="csX19" fmla="*/ 7126184 w 8124314"/>
+              <a:gd name="csX19" fmla="*/ 7207427 w 8124314"/>
               <a:gd name="csY19" fmla="*/ 1200329 h 1200329"/>
-              <a:gd name="csX20" fmla="*/ 6708362 w 8124314"/>
+              <a:gd name="csX20" fmla="*/ 6464633 w 8124314"/>
               <a:gd name="csY20" fmla="*/ 1200329 h 1200329"/>
-              <a:gd name="csX21" fmla="*/ 5965568 w 8124314"/>
+              <a:gd name="csX21" fmla="*/ 5884325 w 8124314"/>
               <a:gd name="csY21" fmla="*/ 1200329 h 1200329"/>
-              <a:gd name="csX22" fmla="*/ 5385260 w 8124314"/>
+              <a:gd name="csX22" fmla="*/ 5547746 w 8124314"/>
               <a:gd name="csY22" fmla="*/ 1200329 h 1200329"/>
               <a:gd name="csX23" fmla="*/ 4967438 w 8124314"/>
               <a:gd name="csY23" fmla="*/ 1200329 h 1200329"/>
-              <a:gd name="csX24" fmla="*/ 4387130 w 8124314"/>
+              <a:gd name="csX24" fmla="*/ 4468373 w 8124314"/>
               <a:gd name="csY24" fmla="*/ 1200329 h 1200329"/>
-              <a:gd name="csX25" fmla="*/ 4050551 w 8124314"/>
+              <a:gd name="csX25" fmla="*/ 3969308 w 8124314"/>
               <a:gd name="csY25" fmla="*/ 1200329 h 1200329"/>
-              <a:gd name="csX26" fmla="*/ 3713972 w 8124314"/>
+              <a:gd name="csX26" fmla="*/ 3470243 w 8124314"/>
               <a:gd name="csY26" fmla="*/ 1200329 h 1200329"/>
-              <a:gd name="csX27" fmla="*/ 3133664 w 8124314"/>
+              <a:gd name="csX27" fmla="*/ 2971178 w 8124314"/>
               <a:gd name="csY27" fmla="*/ 1200329 h 1200329"/>
-              <a:gd name="csX28" fmla="*/ 2715842 w 8124314"/>
+              <a:gd name="csX28" fmla="*/ 2309626 w 8124314"/>
               <a:gd name="csY28" fmla="*/ 1200329 h 1200329"/>
-              <a:gd name="csX29" fmla="*/ 2054291 w 8124314"/>
+              <a:gd name="csX29" fmla="*/ 1729318 w 8124314"/>
               <a:gd name="csY29" fmla="*/ 1200329 h 1200329"/>
-              <a:gd name="csX30" fmla="*/ 1636469 w 8124314"/>
+              <a:gd name="csX30" fmla="*/ 1392740 w 8124314"/>
               <a:gd name="csY30" fmla="*/ 1200329 h 1200329"/>
-              <a:gd name="csX31" fmla="*/ 974918 w 8124314"/>
+              <a:gd name="csX31" fmla="*/ 893675 w 8124314"/>
               <a:gd name="csY31" fmla="*/ 1200329 h 1200329"/>
-              <a:gd name="csX32" fmla="*/ 638339 w 8124314"/>
+              <a:gd name="csX32" fmla="*/ 0 w 8124314"/>
               <a:gd name="csY32" fmla="*/ 1200329 h 1200329"/>
               <a:gd name="csX33" fmla="*/ 0 w 8124314"/>
-              <a:gd name="csY33" fmla="*/ 1200329 h 1200329"/>
+              <a:gd name="csY33" fmla="*/ 824226 h 1200329"/>
               <a:gd name="csX34" fmla="*/ 0 w 8124314"/>
-              <a:gd name="csY34" fmla="*/ 824226 h 1200329"/>
+              <a:gd name="csY34" fmla="*/ 460126 h 1200329"/>
               <a:gd name="csX35" fmla="*/ 0 w 8124314"/>
-              <a:gd name="csY35" fmla="*/ 400110 h 1200329"/>
-              <a:gd name="csX36" fmla="*/ 0 w 8124314"/>
-              <a:gd name="csY36" fmla="*/ 0 h 1200329"/>
+              <a:gd name="csY35" fmla="*/ 0 h 1200329"/>
             </a:gdLst>
             <a:ahLst/>
             <a:cxnLst>
@@ -18183,13 +18422,191 @@
               <a:cxn ang="0">
                 <a:pos x="csX35" y="csY35"/>
               </a:cxn>
-              <a:cxn ang="0">
-                <a:pos x="csX36" y="csY36"/>
-              </a:cxn>
             </a:cxnLst>
             <a:rect l="l" t="t" r="r" b="b"/>
             <a:pathLst>
-              <a:path w="8124314" h="1200329" extrusionOk="0">
+              <a:path w="8124314" h="1200329" fill="none" extrusionOk="0">
+                <a:moveTo>
+                  <a:pt x="0" y="0"/>
+                </a:moveTo>
+                <a:cubicBezTo>
+                  <a:pt x="343521" y="-56691"/>
+                  <a:pt x="406146" y="72381"/>
+                  <a:pt x="742794" y="0"/>
+                </a:cubicBezTo>
+                <a:cubicBezTo>
+                  <a:pt x="1079442" y="-72381"/>
+                  <a:pt x="1073726" y="46952"/>
+                  <a:pt x="1160616" y="0"/>
+                </a:cubicBezTo>
+                <a:cubicBezTo>
+                  <a:pt x="1247506" y="-46952"/>
+                  <a:pt x="1616557" y="22291"/>
+                  <a:pt x="1740924" y="0"/>
+                </a:cubicBezTo>
+                <a:cubicBezTo>
+                  <a:pt x="1865291" y="-22291"/>
+                  <a:pt x="2207055" y="60508"/>
+                  <a:pt x="2402476" y="0"/>
+                </a:cubicBezTo>
+                <a:cubicBezTo>
+                  <a:pt x="2597897" y="-60508"/>
+                  <a:pt x="2647627" y="28256"/>
+                  <a:pt x="2739054" y="0"/>
+                </a:cubicBezTo>
+                <a:cubicBezTo>
+                  <a:pt x="2830481" y="-28256"/>
+                  <a:pt x="2967698" y="805"/>
+                  <a:pt x="3075633" y="0"/>
+                </a:cubicBezTo>
+                <a:cubicBezTo>
+                  <a:pt x="3183568" y="-805"/>
+                  <a:pt x="3646688" y="40256"/>
+                  <a:pt x="3818428" y="0"/>
+                </a:cubicBezTo>
+                <a:cubicBezTo>
+                  <a:pt x="3990169" y="-40256"/>
+                  <a:pt x="4205081" y="12734"/>
+                  <a:pt x="4398736" y="0"/>
+                </a:cubicBezTo>
+                <a:cubicBezTo>
+                  <a:pt x="4592391" y="-12734"/>
+                  <a:pt x="4624223" y="19489"/>
+                  <a:pt x="4735314" y="0"/>
+                </a:cubicBezTo>
+                <a:cubicBezTo>
+                  <a:pt x="4846405" y="-19489"/>
+                  <a:pt x="5156868" y="8215"/>
+                  <a:pt x="5315623" y="0"/>
+                </a:cubicBezTo>
+                <a:cubicBezTo>
+                  <a:pt x="5474378" y="-8215"/>
+                  <a:pt x="5756725" y="69490"/>
+                  <a:pt x="6058417" y="0"/>
+                </a:cubicBezTo>
+                <a:cubicBezTo>
+                  <a:pt x="6360109" y="-69490"/>
+                  <a:pt x="6375943" y="47261"/>
+                  <a:pt x="6557482" y="0"/>
+                </a:cubicBezTo>
+                <a:cubicBezTo>
+                  <a:pt x="6739021" y="-47261"/>
+                  <a:pt x="6853170" y="19157"/>
+                  <a:pt x="7056547" y="0"/>
+                </a:cubicBezTo>
+                <a:cubicBezTo>
+                  <a:pt x="7259925" y="-19157"/>
+                  <a:pt x="7798900" y="70204"/>
+                  <a:pt x="8124314" y="0"/>
+                </a:cubicBezTo>
+                <a:cubicBezTo>
+                  <a:pt x="8162174" y="105674"/>
+                  <a:pt x="8102922" y="312129"/>
+                  <a:pt x="8124314" y="412113"/>
+                </a:cubicBezTo>
+                <a:cubicBezTo>
+                  <a:pt x="8145706" y="512097"/>
+                  <a:pt x="8101593" y="722702"/>
+                  <a:pt x="8124314" y="812223"/>
+                </a:cubicBezTo>
+                <a:cubicBezTo>
+                  <a:pt x="8147035" y="901744"/>
+                  <a:pt x="8089943" y="1051120"/>
+                  <a:pt x="8124314" y="1200329"/>
+                </a:cubicBezTo>
+                <a:cubicBezTo>
+                  <a:pt x="8017999" y="1247515"/>
+                  <a:pt x="7730003" y="1150054"/>
+                  <a:pt x="7625249" y="1200329"/>
+                </a:cubicBezTo>
+                <a:cubicBezTo>
+                  <a:pt x="7520495" y="1250604"/>
+                  <a:pt x="7335313" y="1185494"/>
+                  <a:pt x="7207427" y="1200329"/>
+                </a:cubicBezTo>
+                <a:cubicBezTo>
+                  <a:pt x="7079541" y="1215164"/>
+                  <a:pt x="6741591" y="1123819"/>
+                  <a:pt x="6464633" y="1200329"/>
+                </a:cubicBezTo>
+                <a:cubicBezTo>
+                  <a:pt x="6187675" y="1276839"/>
+                  <a:pt x="6086044" y="1173565"/>
+                  <a:pt x="5884325" y="1200329"/>
+                </a:cubicBezTo>
+                <a:cubicBezTo>
+                  <a:pt x="5682606" y="1227093"/>
+                  <a:pt x="5623799" y="1188201"/>
+                  <a:pt x="5547746" y="1200329"/>
+                </a:cubicBezTo>
+                <a:cubicBezTo>
+                  <a:pt x="5471693" y="1212457"/>
+                  <a:pt x="5252171" y="1145769"/>
+                  <a:pt x="4967438" y="1200329"/>
+                </a:cubicBezTo>
+                <a:cubicBezTo>
+                  <a:pt x="4682705" y="1254889"/>
+                  <a:pt x="4575832" y="1148316"/>
+                  <a:pt x="4468373" y="1200329"/>
+                </a:cubicBezTo>
+                <a:cubicBezTo>
+                  <a:pt x="4360914" y="1252342"/>
+                  <a:pt x="4101154" y="1163037"/>
+                  <a:pt x="3969308" y="1200329"/>
+                </a:cubicBezTo>
+                <a:cubicBezTo>
+                  <a:pt x="3837463" y="1237621"/>
+                  <a:pt x="3645030" y="1149422"/>
+                  <a:pt x="3470243" y="1200329"/>
+                </a:cubicBezTo>
+                <a:cubicBezTo>
+                  <a:pt x="3295456" y="1251236"/>
+                  <a:pt x="3161332" y="1194722"/>
+                  <a:pt x="2971178" y="1200329"/>
+                </a:cubicBezTo>
+                <a:cubicBezTo>
+                  <a:pt x="2781025" y="1205936"/>
+                  <a:pt x="2566326" y="1150814"/>
+                  <a:pt x="2309626" y="1200329"/>
+                </a:cubicBezTo>
+                <a:cubicBezTo>
+                  <a:pt x="2052926" y="1249844"/>
+                  <a:pt x="1848947" y="1159927"/>
+                  <a:pt x="1729318" y="1200329"/>
+                </a:cubicBezTo>
+                <a:cubicBezTo>
+                  <a:pt x="1609689" y="1240731"/>
+                  <a:pt x="1542715" y="1196394"/>
+                  <a:pt x="1392740" y="1200329"/>
+                </a:cubicBezTo>
+                <a:cubicBezTo>
+                  <a:pt x="1242765" y="1204264"/>
+                  <a:pt x="1077712" y="1163907"/>
+                  <a:pt x="893675" y="1200329"/>
+                </a:cubicBezTo>
+                <a:cubicBezTo>
+                  <a:pt x="709639" y="1236751"/>
+                  <a:pt x="353823" y="1188997"/>
+                  <a:pt x="0" y="1200329"/>
+                </a:cubicBezTo>
+                <a:cubicBezTo>
+                  <a:pt x="-35024" y="1081888"/>
+                  <a:pt x="30364" y="902839"/>
+                  <a:pt x="0" y="824226"/>
+                </a:cubicBezTo>
+                <a:cubicBezTo>
+                  <a:pt x="-30364" y="745613"/>
+                  <a:pt x="10811" y="583693"/>
+                  <a:pt x="0" y="460126"/>
+                </a:cubicBezTo>
+                <a:cubicBezTo>
+                  <a:pt x="-10811" y="336559"/>
+                  <a:pt x="15356" y="122870"/>
+                  <a:pt x="0" y="0"/>
+                </a:cubicBezTo>
+                <a:close/>
+              </a:path>
+              <a:path w="8124314" h="1200329" stroke="0" extrusionOk="0">
                 <a:moveTo>
                   <a:pt x="0" y="0"/>
                 </a:moveTo>
@@ -18546,7 +18963,7 @@
       </p:par>
     </p:tnLst>
     <p:bldLst>
-      <p:bldP spid="3" grpId="0"/>
+      <p:bldP spid="3" grpId="0" animBg="1"/>
     </p:bldLst>
   </p:timing>
 </p:sld>
@@ -18905,6 +19322,18 @@
   <p:clrMapOvr>
     <a:masterClrMapping/>
   </p:clrMapOvr>
+  <mc:AlternateContent xmlns:mc="http://schemas.openxmlformats.org/markup-compatibility/2006">
+    <mc:Choice xmlns:p14="http://schemas.microsoft.com/office/powerpoint/2010/main" Requires="p14">
+      <p:transition spd="slow" p14:dur="2000">
+        <p14:prism isContent="1"/>
+      </p:transition>
+    </mc:Choice>
+    <mc:Fallback>
+      <p:transition spd="slow">
+        <p:fade/>
+      </p:transition>
+    </mc:Fallback>
+  </mc:AlternateContent>
 </p:sld>
 </file>
 
@@ -21945,6 +22374,48 @@
           </a:prstGeom>
         </p:spPr>
       </p:pic>
+      <p:sp>
+        <p:nvSpPr>
+          <p:cNvPr id="5" name="TextBox 4">
+            <a:extLst>
+              <a:ext uri="{FF2B5EF4-FFF2-40B4-BE49-F238E27FC236}">
+                <a16:creationId xmlns:a16="http://schemas.microsoft.com/office/drawing/2014/main" id="{DD6B7E43-36B8-76EC-30DD-4BA4B8957951}"/>
+              </a:ext>
+            </a:extLst>
+          </p:cNvPr>
+          <p:cNvSpPr txBox="1"/>
+          <p:nvPr/>
+        </p:nvSpPr>
+        <p:spPr>
+          <a:xfrm>
+            <a:off x="838200" y="5715000"/>
+            <a:ext cx="7620000" cy="369332"/>
+          </a:xfrm>
+          <a:prstGeom prst="rect">
+            <a:avLst/>
+          </a:prstGeom>
+          <a:noFill/>
+        </p:spPr>
+        <p:txBody>
+          <a:bodyPr wrap="square" rtlCol="0">
+            <a:spAutoFit/>
+          </a:bodyPr>
+          <a:lstStyle/>
+          <a:p>
+            <a:r>
+              <a:rPr lang="en-CA" dirty="0"/>
+              <a:t>See: </a:t>
+            </a:r>
+            <a:r>
+              <a:rPr lang="en-CA" b="1" dirty="0">
+                <a:hlinkClick r:id="rId3"/>
+              </a:rPr>
+              <a:t>Negative Binomial: Interpreting the overdispersion parameter</a:t>
+            </a:r>
+            <a:endParaRPr lang="en-CA" b="1" dirty="0"/>
+          </a:p>
+        </p:txBody>
+      </p:sp>
     </p:spTree>
     <p:extLst>
       <p:ext uri="{BB962C8B-B14F-4D97-AF65-F5344CB8AC3E}">
@@ -22136,6 +22607,84 @@
               <a:rPr lang="en-US" b="1" dirty="0"/>
               <a:t>↑ as α increases</a:t>
             </a:r>
+          </a:p>
+        </p:txBody>
+      </p:sp>
+      <p:cxnSp>
+        <p:nvCxnSpPr>
+          <p:cNvPr id="7" name="Straight Arrow Connector 6">
+            <a:extLst>
+              <a:ext uri="{FF2B5EF4-FFF2-40B4-BE49-F238E27FC236}">
+                <a16:creationId xmlns:a16="http://schemas.microsoft.com/office/drawing/2014/main" id="{7B1E520F-5790-A73A-3DF3-BB12C3EA39B9}"/>
+              </a:ext>
+            </a:extLst>
+          </p:cNvPr>
+          <p:cNvCxnSpPr/>
+          <p:nvPr/>
+        </p:nvCxnSpPr>
+        <p:spPr>
+          <a:xfrm>
+            <a:off x="1066800" y="1371600"/>
+            <a:ext cx="4267200" cy="0"/>
+          </a:xfrm>
+          <a:prstGeom prst="straightConnector1">
+            <a:avLst/>
+          </a:prstGeom>
+          <a:ln w="25400">
+            <a:solidFill>
+              <a:srgbClr val="FF0000"/>
+            </a:solidFill>
+            <a:tailEnd type="triangle"/>
+          </a:ln>
+        </p:spPr>
+        <p:style>
+          <a:lnRef idx="1">
+            <a:schemeClr val="accent1"/>
+          </a:lnRef>
+          <a:fillRef idx="0">
+            <a:schemeClr val="accent1"/>
+          </a:fillRef>
+          <a:effectRef idx="0">
+            <a:schemeClr val="accent1"/>
+          </a:effectRef>
+          <a:fontRef idx="minor">
+            <a:schemeClr val="tx1"/>
+          </a:fontRef>
+        </p:style>
+      </p:cxnSp>
+      <p:sp>
+        <p:nvSpPr>
+          <p:cNvPr id="8" name="TextBox 7">
+            <a:extLst>
+              <a:ext uri="{FF2B5EF4-FFF2-40B4-BE49-F238E27FC236}">
+                <a16:creationId xmlns:a16="http://schemas.microsoft.com/office/drawing/2014/main" id="{A442B3F8-3F05-05F0-3874-E982D2E168B5}"/>
+              </a:ext>
+            </a:extLst>
+          </p:cNvPr>
+          <p:cNvSpPr txBox="1"/>
+          <p:nvPr/>
+        </p:nvSpPr>
+        <p:spPr>
+          <a:xfrm>
+            <a:off x="5360066" y="1076980"/>
+            <a:ext cx="304800" cy="523220"/>
+          </a:xfrm>
+          <a:prstGeom prst="rect">
+            <a:avLst/>
+          </a:prstGeom>
+          <a:noFill/>
+        </p:spPr>
+        <p:txBody>
+          <a:bodyPr wrap="square" rtlCol="0">
+            <a:spAutoFit/>
+          </a:bodyPr>
+          <a:lstStyle/>
+          <a:p>
+            <a:r>
+              <a:rPr lang="el-GR" sz="2800" dirty="0"/>
+              <a:t>θ</a:t>
+            </a:r>
+            <a:endParaRPr lang="en-US" sz="2800" dirty="0"/>
           </a:p>
         </p:txBody>
       </p:sp>
@@ -23051,6 +23600,118 @@
           </a:p>
         </p:txBody>
       </p:sp>
+      <mc:AlternateContent xmlns:mc="http://schemas.openxmlformats.org/markup-compatibility/2006">
+        <mc:Choice xmlns:a14="http://schemas.microsoft.com/office/drawing/2010/main" Requires="a14">
+          <p:sp>
+            <p:nvSpPr>
+              <p:cNvPr id="10" name="TextBox 9">
+                <a:extLst>
+                  <a:ext uri="{FF2B5EF4-FFF2-40B4-BE49-F238E27FC236}">
+                    <a16:creationId xmlns:a16="http://schemas.microsoft.com/office/drawing/2014/main" id="{BC86F44C-EE75-8B30-048F-B71167F4CCE3}"/>
+                  </a:ext>
+                </a:extLst>
+              </p:cNvPr>
+              <p:cNvSpPr txBox="1"/>
+              <p:nvPr/>
+            </p:nvSpPr>
+            <p:spPr>
+              <a:xfrm>
+                <a:off x="4572000" y="5334000"/>
+                <a:ext cx="4114800" cy="666977"/>
+              </a:xfrm>
+              <a:prstGeom prst="rect">
+                <a:avLst/>
+              </a:prstGeom>
+              <a:noFill/>
+            </p:spPr>
+            <p:txBody>
+              <a:bodyPr wrap="square" rtlCol="0">
+                <a:spAutoFit/>
+              </a:bodyPr>
+              <a:lstStyle/>
+              <a:p>
+                <a:r>
+                  <a:rPr lang="en-CA" dirty="0"/>
+                  <a:t>Individual pub rates vary by a factor with SD = </a:t>
+                </a:r>
+                <a14:m>
+                  <m:oMath xmlns:m="http://schemas.openxmlformats.org/officeDocument/2006/math">
+                    <m:r>
+                      <a:rPr lang="en-CA" i="1" dirty="0" smtClean="0">
+                        <a:latin typeface="Cambria Math" panose="02040503050406030204" pitchFamily="18" charset="0"/>
+                        <a:ea typeface="Cambria Math" panose="02040503050406030204" pitchFamily="18" charset="0"/>
+                        <a:cs typeface="Calibri" panose="020F0502020204030204" pitchFamily="34" charset="0"/>
+                      </a:rPr>
+                      <m:t>√</m:t>
+                    </m:r>
+                    <m:r>
+                      <a:rPr lang="en-CA" i="1" dirty="0" smtClean="0">
+                        <a:latin typeface="Cambria Math" panose="02040503050406030204" pitchFamily="18" charset="0"/>
+                        <a:ea typeface="Cambria Math" panose="02040503050406030204" pitchFamily="18" charset="0"/>
+                        <a:cs typeface="Calibri" panose="020F0502020204030204" pitchFamily="34" charset="0"/>
+                      </a:rPr>
+                      <m:t>𝛼</m:t>
+                    </m:r>
+                  </m:oMath>
+                </a14:m>
+                <a:r>
+                  <a:rPr lang="en-CA" dirty="0">
+                    <a:latin typeface="Calibri" panose="020F0502020204030204" pitchFamily="34" charset="0"/>
+                    <a:ea typeface="Calibri" panose="020F0502020204030204" pitchFamily="34" charset="0"/>
+                    <a:cs typeface="Calibri" panose="020F0502020204030204" pitchFamily="34" charset="0"/>
+                  </a:rPr>
+                  <a:t>= 0.66 around predicted rates</a:t>
+                </a:r>
+                <a:endParaRPr lang="en-CA" dirty="0"/>
+              </a:p>
+            </p:txBody>
+          </p:sp>
+        </mc:Choice>
+        <mc:Fallback>
+          <p:sp>
+            <p:nvSpPr>
+              <p:cNvPr id="10" name="TextBox 9">
+                <a:extLst>
+                  <a:ext uri="{FF2B5EF4-FFF2-40B4-BE49-F238E27FC236}">
+                    <a16:creationId xmlns:a16="http://schemas.microsoft.com/office/drawing/2014/main" id="{BC86F44C-EE75-8B30-048F-B71167F4CCE3}"/>
+                  </a:ext>
+                </a:extLst>
+              </p:cNvPr>
+              <p:cNvSpPr txBox="1">
+                <a:spLocks noRot="1" noChangeAspect="1" noMove="1" noResize="1" noEditPoints="1" noAdjustHandles="1" noChangeArrowheads="1" noChangeShapeType="1" noTextEdit="1"/>
+              </p:cNvSpPr>
+              <p:nvPr/>
+            </p:nvSpPr>
+            <p:spPr>
+              <a:xfrm>
+                <a:off x="4572000" y="5334000"/>
+                <a:ext cx="4114800" cy="666977"/>
+              </a:xfrm>
+              <a:prstGeom prst="rect">
+                <a:avLst/>
+              </a:prstGeom>
+              <a:blipFill>
+                <a:blip r:embed="rId4"/>
+                <a:stretch>
+                  <a:fillRect l="-1185" t="-4587" b="-14679"/>
+                </a:stretch>
+              </a:blipFill>
+            </p:spPr>
+            <p:txBody>
+              <a:bodyPr/>
+              <a:lstStyle/>
+              <a:p>
+                <a:r>
+                  <a:rPr lang="en-CA">
+                    <a:noFill/>
+                  </a:rPr>
+                  <a:t> </a:t>
+                </a:r>
+              </a:p>
+            </p:txBody>
+          </p:sp>
+        </mc:Fallback>
+      </mc:AlternateContent>
     </p:spTree>
     <p:extLst>
       <p:ext uri="{BB962C8B-B14F-4D97-AF65-F5344CB8AC3E}">
@@ -26169,6 +26830,113 @@
           </a:p>
         </p:txBody>
       </p:sp>
+      <p:pic>
+        <p:nvPicPr>
+          <p:cNvPr id="15" name="Picture 14">
+            <a:extLst>
+              <a:ext uri="{FF2B5EF4-FFF2-40B4-BE49-F238E27FC236}">
+                <a16:creationId xmlns:a16="http://schemas.microsoft.com/office/drawing/2014/main" id="{BC0403B7-1062-1B17-497A-F2627448BDAD}"/>
+              </a:ext>
+            </a:extLst>
+          </p:cNvPr>
+          <p:cNvPicPr>
+            <a:picLocks noChangeAspect="1"/>
+          </p:cNvPicPr>
+          <p:nvPr/>
+        </p:nvPicPr>
+        <p:blipFill>
+          <a:blip r:embed="rId3">
+            <a:extLst>
+              <a:ext uri="{28A0092B-C50C-407E-A947-70E740481C1C}">
+                <a14:useLocalDpi xmlns:a14="http://schemas.microsoft.com/office/drawing/2010/main" val="0"/>
+              </a:ext>
+            </a:extLst>
+          </a:blip>
+          <a:stretch>
+            <a:fillRect/>
+          </a:stretch>
+        </p:blipFill>
+        <p:spPr>
+          <a:xfrm rot="13740000">
+            <a:off x="4688984" y="2601343"/>
+            <a:ext cx="3353564" cy="3353564"/>
+          </a:xfrm>
+          <a:prstGeom prst="rect">
+            <a:avLst/>
+          </a:prstGeom>
+        </p:spPr>
+      </p:pic>
+      <p:sp>
+        <p:nvSpPr>
+          <p:cNvPr id="16" name="TextBox 15">
+            <a:extLst>
+              <a:ext uri="{FF2B5EF4-FFF2-40B4-BE49-F238E27FC236}">
+                <a16:creationId xmlns:a16="http://schemas.microsoft.com/office/drawing/2014/main" id="{660E2F3C-11E8-DDCF-3C28-CEE61BF4A894}"/>
+              </a:ext>
+            </a:extLst>
+          </p:cNvPr>
+          <p:cNvSpPr txBox="1"/>
+          <p:nvPr/>
+        </p:nvSpPr>
+        <p:spPr>
+          <a:xfrm rot="21388696">
+            <a:off x="2514600" y="3372415"/>
+            <a:ext cx="1752600" cy="523220"/>
+          </a:xfrm>
+          <a:prstGeom prst="rect">
+            <a:avLst/>
+          </a:prstGeom>
+          <a:noFill/>
+        </p:spPr>
+        <p:txBody>
+          <a:bodyPr wrap="square" rtlCol="0">
+            <a:spAutoFit/>
+          </a:bodyPr>
+          <a:lstStyle/>
+          <a:p>
+            <a:r>
+              <a:rPr lang="en-CA" sz="2800" dirty="0"/>
+              <a:t>Hurdle</a:t>
+            </a:r>
+          </a:p>
+        </p:txBody>
+      </p:sp>
+      <p:sp>
+        <p:nvSpPr>
+          <p:cNvPr id="17" name="TextBox 16">
+            <a:extLst>
+              <a:ext uri="{FF2B5EF4-FFF2-40B4-BE49-F238E27FC236}">
+                <a16:creationId xmlns:a16="http://schemas.microsoft.com/office/drawing/2014/main" id="{2766C756-B34B-CAB0-3A03-C0519DC616D3}"/>
+              </a:ext>
+            </a:extLst>
+          </p:cNvPr>
+          <p:cNvSpPr txBox="1"/>
+          <p:nvPr/>
+        </p:nvSpPr>
+        <p:spPr>
+          <a:xfrm rot="19296563">
+            <a:off x="5803170" y="3381206"/>
+            <a:ext cx="1219200" cy="461665"/>
+          </a:xfrm>
+          <a:prstGeom prst="rect">
+            <a:avLst/>
+          </a:prstGeom>
+          <a:noFill/>
+        </p:spPr>
+        <p:txBody>
+          <a:bodyPr wrap="square" rtlCol="0">
+            <a:spAutoFit/>
+          </a:bodyPr>
+          <a:lstStyle/>
+          <a:p>
+            <a:pPr algn="ctr"/>
+            <a:r>
+              <a:rPr lang="en-CA" sz="2400" dirty="0"/>
+              <a:t>ZIP</a:t>
+            </a:r>
+          </a:p>
+        </p:txBody>
+      </p:sp>
     </p:spTree>
     <p:extLst>
       <p:ext uri="{BB962C8B-B14F-4D97-AF65-F5344CB8AC3E}">
@@ -28132,6 +28900,84 @@
           </a:prstGeom>
         </p:spPr>
       </p:pic>
+      <p:sp>
+        <p:nvSpPr>
+          <p:cNvPr id="8" name="TextBox 7">
+            <a:extLst>
+              <a:ext uri="{FF2B5EF4-FFF2-40B4-BE49-F238E27FC236}">
+                <a16:creationId xmlns:a16="http://schemas.microsoft.com/office/drawing/2014/main" id="{EF859180-0207-1A8C-3F1E-5733360FE203}"/>
+              </a:ext>
+            </a:extLst>
+          </p:cNvPr>
+          <p:cNvSpPr txBox="1"/>
+          <p:nvPr/>
+        </p:nvSpPr>
+        <p:spPr>
+          <a:xfrm>
+            <a:off x="315858" y="2079306"/>
+            <a:ext cx="1313428" cy="369332"/>
+          </a:xfrm>
+          <a:prstGeom prst="rect">
+            <a:avLst/>
+          </a:prstGeom>
+          <a:noFill/>
+        </p:spPr>
+        <p:txBody>
+          <a:bodyPr wrap="square" rtlCol="0">
+            <a:spAutoFit/>
+          </a:bodyPr>
+          <a:lstStyle/>
+          <a:p>
+            <a:r>
+              <a:rPr lang="en-CA" dirty="0">
+                <a:solidFill>
+                  <a:srgbClr val="FF0000"/>
+                </a:solidFill>
+              </a:rPr>
+              <a:t>zero model</a:t>
+            </a:r>
+          </a:p>
+        </p:txBody>
+      </p:sp>
+      <p:sp>
+        <p:nvSpPr>
+          <p:cNvPr id="9" name="TextBox 8">
+            <a:extLst>
+              <a:ext uri="{FF2B5EF4-FFF2-40B4-BE49-F238E27FC236}">
+                <a16:creationId xmlns:a16="http://schemas.microsoft.com/office/drawing/2014/main" id="{3BBA72E7-3C65-CED9-8F8D-E6410CD69325}"/>
+              </a:ext>
+            </a:extLst>
+          </p:cNvPr>
+          <p:cNvSpPr txBox="1"/>
+          <p:nvPr/>
+        </p:nvSpPr>
+        <p:spPr>
+          <a:xfrm>
+            <a:off x="315858" y="2586752"/>
+            <a:ext cx="1447800" cy="369332"/>
+          </a:xfrm>
+          <a:prstGeom prst="rect">
+            <a:avLst/>
+          </a:prstGeom>
+          <a:noFill/>
+        </p:spPr>
+        <p:txBody>
+          <a:bodyPr wrap="square" rtlCol="0">
+            <a:spAutoFit/>
+          </a:bodyPr>
+          <a:lstStyle/>
+          <a:p>
+            <a:r>
+              <a:rPr lang="en-CA" dirty="0">
+                <a:solidFill>
+                  <a:srgbClr val="FF0000"/>
+                </a:solidFill>
+              </a:rPr>
+              <a:t>count model</a:t>
+            </a:r>
+          </a:p>
+        </p:txBody>
+      </p:sp>
     </p:spTree>
     <p:extLst>
       <p:ext uri="{BB962C8B-B14F-4D97-AF65-F5344CB8AC3E}">
@@ -43374,7 +44220,7 @@
               <a:t> &lt;- </a:t>
             </a:r>
             <a:r>
-              <a:rPr lang="en-US" sz="1400" dirty="0" err="1">
+              <a:rPr lang="en-US" sz="1400" b="1" dirty="0" err="1">
                 <a:latin typeface="Courier New" panose="02070309020205020404" pitchFamily="49" charset="0"/>
                 <a:cs typeface="Courier New" panose="02070309020205020404" pitchFamily="49" charset="0"/>
               </a:rPr>
